--- a/Relatórios/AR/AR_apresentação.pptx
+++ b/Relatórios/AR/AR_apresentação.pptx
@@ -4,8 +4,11 @@
   <p:sldMasterIdLst>
     <p:sldMasterId id="2147483648" r:id="rId1"/>
   </p:sldMasterIdLst>
+  <p:notesMasterIdLst>
+    <p:notesMasterId r:id="rId17"/>
+  </p:notesMasterIdLst>
   <p:sldIdLst>
-    <p:sldId id="256" r:id="rId2"/>
+    <p:sldId id="277" r:id="rId2"/>
     <p:sldId id="266" r:id="rId3"/>
     <p:sldId id="267" r:id="rId4"/>
     <p:sldId id="268" r:id="rId5"/>
@@ -13,14 +16,13 @@
     <p:sldId id="270" r:id="rId7"/>
     <p:sldId id="271" r:id="rId8"/>
     <p:sldId id="273" r:id="rId9"/>
-    <p:sldId id="272" r:id="rId10"/>
-    <p:sldId id="274" r:id="rId11"/>
-    <p:sldId id="262" r:id="rId12"/>
+    <p:sldId id="275" r:id="rId10"/>
+    <p:sldId id="276" r:id="rId11"/>
+    <p:sldId id="274" r:id="rId12"/>
     <p:sldId id="265" r:id="rId13"/>
-    <p:sldId id="261" r:id="rId14"/>
-    <p:sldId id="264" r:id="rId15"/>
-    <p:sldId id="257" r:id="rId16"/>
-    <p:sldId id="263" r:id="rId17"/>
+    <p:sldId id="264" r:id="rId14"/>
+    <p:sldId id="257" r:id="rId15"/>
+    <p:sldId id="263" r:id="rId16"/>
   </p:sldIdLst>
   <p:sldSz cx="12192000" cy="6858000"/>
   <p:notesSz cx="6858000" cy="9144000"/>
@@ -119,7 +121,549 @@
       </a:defRPr>
     </a:lvl9pPr>
   </p:defaultTextStyle>
+  <p:extLst>
+    <p:ext uri="{EFAFB233-063F-42B5-8137-9DF3F51BA10A}">
+      <p15:sldGuideLst xmlns:p15="http://schemas.microsoft.com/office/powerpoint/2012/main"/>
+    </p:ext>
+  </p:extLst>
 </p:presentation>
+</file>
+
+<file path=ppt/notesMasters/notesMaster1.xml><?xml version="1.0" encoding="utf-8"?>
+<p:notesMaster xmlns:a="http://schemas.openxmlformats.org/drawingml/2006/main" xmlns:r="http://schemas.openxmlformats.org/officeDocument/2006/relationships" xmlns:p="http://schemas.openxmlformats.org/presentationml/2006/main">
+  <p:cSld>
+    <p:bg>
+      <p:bgRef idx="1001">
+        <a:schemeClr val="bg1"/>
+      </p:bgRef>
+    </p:bg>
+    <p:spTree>
+      <p:nvGrpSpPr>
+        <p:cNvPr id="1" name=""/>
+        <p:cNvGrpSpPr/>
+        <p:nvPr/>
+      </p:nvGrpSpPr>
+      <p:grpSpPr>
+        <a:xfrm>
+          <a:off x="0" y="0"/>
+          <a:ext cx="0" cy="0"/>
+          <a:chOff x="0" y="0"/>
+          <a:chExt cx="0" cy="0"/>
+        </a:xfrm>
+      </p:grpSpPr>
+      <p:sp>
+        <p:nvSpPr>
+          <p:cNvPr id="2" name="Header Placeholder 1"/>
+          <p:cNvSpPr>
+            <a:spLocks noGrp="1"/>
+          </p:cNvSpPr>
+          <p:nvPr>
+            <p:ph type="hdr" sz="quarter"/>
+          </p:nvPr>
+        </p:nvSpPr>
+        <p:spPr>
+          <a:xfrm>
+            <a:off x="0" y="0"/>
+            <a:ext cx="2971800" cy="458788"/>
+          </a:xfrm>
+          <a:prstGeom prst="rect">
+            <a:avLst/>
+          </a:prstGeom>
+        </p:spPr>
+        <p:txBody>
+          <a:bodyPr vert="horz" lIns="91440" tIns="45720" rIns="91440" bIns="45720" rtlCol="0"/>
+          <a:lstStyle>
+            <a:lvl1pPr algn="l">
+              <a:defRPr sz="1200"/>
+            </a:lvl1pPr>
+          </a:lstStyle>
+          <a:p>
+            <a:endParaRPr lang="en-GB"/>
+          </a:p>
+        </p:txBody>
+      </p:sp>
+      <p:sp>
+        <p:nvSpPr>
+          <p:cNvPr id="3" name="Date Placeholder 2"/>
+          <p:cNvSpPr>
+            <a:spLocks noGrp="1"/>
+          </p:cNvSpPr>
+          <p:nvPr>
+            <p:ph type="dt" idx="1"/>
+          </p:nvPr>
+        </p:nvSpPr>
+        <p:spPr>
+          <a:xfrm>
+            <a:off x="3884613" y="0"/>
+            <a:ext cx="2971800" cy="458788"/>
+          </a:xfrm>
+          <a:prstGeom prst="rect">
+            <a:avLst/>
+          </a:prstGeom>
+        </p:spPr>
+        <p:txBody>
+          <a:bodyPr vert="horz" lIns="91440" tIns="45720" rIns="91440" bIns="45720" rtlCol="0"/>
+          <a:lstStyle>
+            <a:lvl1pPr algn="r">
+              <a:defRPr sz="1200"/>
+            </a:lvl1pPr>
+          </a:lstStyle>
+          <a:p>
+            <a:fld id="{A19B1A07-4978-4516-A4E6-58A8CDD44A2D}" type="datetimeFigureOut">
+              <a:rPr lang="en-GB" smtClean="0"/>
+              <a:t>01/06/2026</a:t>
+            </a:fld>
+            <a:endParaRPr lang="en-GB"/>
+          </a:p>
+        </p:txBody>
+      </p:sp>
+      <p:sp>
+        <p:nvSpPr>
+          <p:cNvPr id="4" name="Slide Image Placeholder 3"/>
+          <p:cNvSpPr>
+            <a:spLocks noGrp="1" noRot="1" noChangeAspect="1"/>
+          </p:cNvSpPr>
+          <p:nvPr>
+            <p:ph type="sldImg" idx="2"/>
+          </p:nvPr>
+        </p:nvSpPr>
+        <p:spPr>
+          <a:xfrm>
+            <a:off x="685800" y="1143000"/>
+            <a:ext cx="5486400" cy="3086100"/>
+          </a:xfrm>
+          <a:prstGeom prst="rect">
+            <a:avLst/>
+          </a:prstGeom>
+          <a:noFill/>
+          <a:ln w="12700">
+            <a:solidFill>
+              <a:prstClr val="black"/>
+            </a:solidFill>
+          </a:ln>
+        </p:spPr>
+        <p:txBody>
+          <a:bodyPr vert="horz" lIns="91440" tIns="45720" rIns="91440" bIns="45720" rtlCol="0" anchor="ctr"/>
+          <a:lstStyle/>
+          <a:p>
+            <a:endParaRPr lang="en-GB"/>
+          </a:p>
+        </p:txBody>
+      </p:sp>
+      <p:sp>
+        <p:nvSpPr>
+          <p:cNvPr id="5" name="Notes Placeholder 4"/>
+          <p:cNvSpPr>
+            <a:spLocks noGrp="1"/>
+          </p:cNvSpPr>
+          <p:nvPr>
+            <p:ph type="body" sz="quarter" idx="3"/>
+          </p:nvPr>
+        </p:nvSpPr>
+        <p:spPr>
+          <a:xfrm>
+            <a:off x="685800" y="4400550"/>
+            <a:ext cx="5486400" cy="3600450"/>
+          </a:xfrm>
+          <a:prstGeom prst="rect">
+            <a:avLst/>
+          </a:prstGeom>
+        </p:spPr>
+        <p:txBody>
+          <a:bodyPr vert="horz" lIns="91440" tIns="45720" rIns="91440" bIns="45720" rtlCol="0"/>
+          <a:lstStyle/>
+          <a:p>
+            <a:pPr lvl="0"/>
+            <a:r>
+              <a:rPr lang="en-GB"/>
+              <a:t>Click to edit Master text styles</a:t>
+            </a:r>
+          </a:p>
+          <a:p>
+            <a:pPr lvl="1"/>
+            <a:r>
+              <a:rPr lang="en-GB"/>
+              <a:t>Second level</a:t>
+            </a:r>
+          </a:p>
+          <a:p>
+            <a:pPr lvl="2"/>
+            <a:r>
+              <a:rPr lang="en-GB"/>
+              <a:t>Third level</a:t>
+            </a:r>
+          </a:p>
+          <a:p>
+            <a:pPr lvl="3"/>
+            <a:r>
+              <a:rPr lang="en-GB"/>
+              <a:t>Fourth level</a:t>
+            </a:r>
+          </a:p>
+          <a:p>
+            <a:pPr lvl="4"/>
+            <a:r>
+              <a:rPr lang="en-GB"/>
+              <a:t>Fifth level</a:t>
+            </a:r>
+          </a:p>
+        </p:txBody>
+      </p:sp>
+      <p:sp>
+        <p:nvSpPr>
+          <p:cNvPr id="6" name="Footer Placeholder 5"/>
+          <p:cNvSpPr>
+            <a:spLocks noGrp="1"/>
+          </p:cNvSpPr>
+          <p:nvPr>
+            <p:ph type="ftr" sz="quarter" idx="4"/>
+          </p:nvPr>
+        </p:nvSpPr>
+        <p:spPr>
+          <a:xfrm>
+            <a:off x="0" y="8685213"/>
+            <a:ext cx="2971800" cy="458787"/>
+          </a:xfrm>
+          <a:prstGeom prst="rect">
+            <a:avLst/>
+          </a:prstGeom>
+        </p:spPr>
+        <p:txBody>
+          <a:bodyPr vert="horz" lIns="91440" tIns="45720" rIns="91440" bIns="45720" rtlCol="0" anchor="b"/>
+          <a:lstStyle>
+            <a:lvl1pPr algn="l">
+              <a:defRPr sz="1200"/>
+            </a:lvl1pPr>
+          </a:lstStyle>
+          <a:p>
+            <a:endParaRPr lang="en-GB"/>
+          </a:p>
+        </p:txBody>
+      </p:sp>
+      <p:sp>
+        <p:nvSpPr>
+          <p:cNvPr id="7" name="Slide Number Placeholder 6"/>
+          <p:cNvSpPr>
+            <a:spLocks noGrp="1"/>
+          </p:cNvSpPr>
+          <p:nvPr>
+            <p:ph type="sldNum" sz="quarter" idx="5"/>
+          </p:nvPr>
+        </p:nvSpPr>
+        <p:spPr>
+          <a:xfrm>
+            <a:off x="3884613" y="8685213"/>
+            <a:ext cx="2971800" cy="458787"/>
+          </a:xfrm>
+          <a:prstGeom prst="rect">
+            <a:avLst/>
+          </a:prstGeom>
+        </p:spPr>
+        <p:txBody>
+          <a:bodyPr vert="horz" lIns="91440" tIns="45720" rIns="91440" bIns="45720" rtlCol="0" anchor="b"/>
+          <a:lstStyle>
+            <a:lvl1pPr algn="r">
+              <a:defRPr sz="1200"/>
+            </a:lvl1pPr>
+          </a:lstStyle>
+          <a:p>
+            <a:fld id="{0317239E-B35E-4F10-90B5-31FF182819A9}" type="slidenum">
+              <a:rPr lang="en-GB" smtClean="0"/>
+              <a:t>‹#›</a:t>
+            </a:fld>
+            <a:endParaRPr lang="en-GB"/>
+          </a:p>
+        </p:txBody>
+      </p:sp>
+    </p:spTree>
+    <p:extLst>
+      <p:ext uri="{BB962C8B-B14F-4D97-AF65-F5344CB8AC3E}">
+        <p14:creationId xmlns:p14="http://schemas.microsoft.com/office/powerpoint/2010/main" val="924286337"/>
+      </p:ext>
+    </p:extLst>
+  </p:cSld>
+  <p:clrMap bg1="lt1" tx1="dk1" bg2="lt2" tx2="dk2" accent1="accent1" accent2="accent2" accent3="accent3" accent4="accent4" accent5="accent5" accent6="accent6" hlink="hlink" folHlink="folHlink"/>
+  <p:notesStyle>
+    <a:lvl1pPr marL="0" algn="l" defTabSz="914400" rtl="0" eaLnBrk="1" latinLnBrk="0" hangingPunct="1">
+      <a:defRPr sz="1200" kern="1200">
+        <a:solidFill>
+          <a:schemeClr val="tx1"/>
+        </a:solidFill>
+        <a:latin typeface="+mn-lt"/>
+        <a:ea typeface="+mn-ea"/>
+        <a:cs typeface="+mn-cs"/>
+      </a:defRPr>
+    </a:lvl1pPr>
+    <a:lvl2pPr marL="457200" algn="l" defTabSz="914400" rtl="0" eaLnBrk="1" latinLnBrk="0" hangingPunct="1">
+      <a:defRPr sz="1200" kern="1200">
+        <a:solidFill>
+          <a:schemeClr val="tx1"/>
+        </a:solidFill>
+        <a:latin typeface="+mn-lt"/>
+        <a:ea typeface="+mn-ea"/>
+        <a:cs typeface="+mn-cs"/>
+      </a:defRPr>
+    </a:lvl2pPr>
+    <a:lvl3pPr marL="914400" algn="l" defTabSz="914400" rtl="0" eaLnBrk="1" latinLnBrk="0" hangingPunct="1">
+      <a:defRPr sz="1200" kern="1200">
+        <a:solidFill>
+          <a:schemeClr val="tx1"/>
+        </a:solidFill>
+        <a:latin typeface="+mn-lt"/>
+        <a:ea typeface="+mn-ea"/>
+        <a:cs typeface="+mn-cs"/>
+      </a:defRPr>
+    </a:lvl3pPr>
+    <a:lvl4pPr marL="1371600" algn="l" defTabSz="914400" rtl="0" eaLnBrk="1" latinLnBrk="0" hangingPunct="1">
+      <a:defRPr sz="1200" kern="1200">
+        <a:solidFill>
+          <a:schemeClr val="tx1"/>
+        </a:solidFill>
+        <a:latin typeface="+mn-lt"/>
+        <a:ea typeface="+mn-ea"/>
+        <a:cs typeface="+mn-cs"/>
+      </a:defRPr>
+    </a:lvl4pPr>
+    <a:lvl5pPr marL="1828800" algn="l" defTabSz="914400" rtl="0" eaLnBrk="1" latinLnBrk="0" hangingPunct="1">
+      <a:defRPr sz="1200" kern="1200">
+        <a:solidFill>
+          <a:schemeClr val="tx1"/>
+        </a:solidFill>
+        <a:latin typeface="+mn-lt"/>
+        <a:ea typeface="+mn-ea"/>
+        <a:cs typeface="+mn-cs"/>
+      </a:defRPr>
+    </a:lvl5pPr>
+    <a:lvl6pPr marL="2286000" algn="l" defTabSz="914400" rtl="0" eaLnBrk="1" latinLnBrk="0" hangingPunct="1">
+      <a:defRPr sz="1200" kern="1200">
+        <a:solidFill>
+          <a:schemeClr val="tx1"/>
+        </a:solidFill>
+        <a:latin typeface="+mn-lt"/>
+        <a:ea typeface="+mn-ea"/>
+        <a:cs typeface="+mn-cs"/>
+      </a:defRPr>
+    </a:lvl6pPr>
+    <a:lvl7pPr marL="2743200" algn="l" defTabSz="914400" rtl="0" eaLnBrk="1" latinLnBrk="0" hangingPunct="1">
+      <a:defRPr sz="1200" kern="1200">
+        <a:solidFill>
+          <a:schemeClr val="tx1"/>
+        </a:solidFill>
+        <a:latin typeface="+mn-lt"/>
+        <a:ea typeface="+mn-ea"/>
+        <a:cs typeface="+mn-cs"/>
+      </a:defRPr>
+    </a:lvl7pPr>
+    <a:lvl8pPr marL="3200400" algn="l" defTabSz="914400" rtl="0" eaLnBrk="1" latinLnBrk="0" hangingPunct="1">
+      <a:defRPr sz="1200" kern="1200">
+        <a:solidFill>
+          <a:schemeClr val="tx1"/>
+        </a:solidFill>
+        <a:latin typeface="+mn-lt"/>
+        <a:ea typeface="+mn-ea"/>
+        <a:cs typeface="+mn-cs"/>
+      </a:defRPr>
+    </a:lvl8pPr>
+    <a:lvl9pPr marL="3657600" algn="l" defTabSz="914400" rtl="0" eaLnBrk="1" latinLnBrk="0" hangingPunct="1">
+      <a:defRPr sz="1200" kern="1200">
+        <a:solidFill>
+          <a:schemeClr val="tx1"/>
+        </a:solidFill>
+        <a:latin typeface="+mn-lt"/>
+        <a:ea typeface="+mn-ea"/>
+        <a:cs typeface="+mn-cs"/>
+      </a:defRPr>
+    </a:lvl9pPr>
+  </p:notesStyle>
+</p:notesMaster>
+</file>
+
+<file path=ppt/notesSlides/notesSlide1.xml><?xml version="1.0" encoding="utf-8"?>
+<p:notes xmlns:a="http://schemas.openxmlformats.org/drawingml/2006/main" xmlns:r="http://schemas.openxmlformats.org/officeDocument/2006/relationships" xmlns:p="http://schemas.openxmlformats.org/presentationml/2006/main" showMasterSp="0" showMasterPhAnim="0">
+  <p:cSld>
+    <p:spTree>
+      <p:nvGrpSpPr>
+        <p:cNvPr id="1" name="Shape 50"/>
+        <p:cNvGrpSpPr/>
+        <p:nvPr/>
+      </p:nvGrpSpPr>
+      <p:grpSpPr>
+        <a:xfrm>
+          <a:off x="0" y="0"/>
+          <a:ext cx="0" cy="0"/>
+          <a:chOff x="0" y="0"/>
+          <a:chExt cx="0" cy="0"/>
+        </a:xfrm>
+      </p:grpSpPr>
+      <p:sp>
+        <p:nvSpPr>
+          <p:cNvPr id="51" name="Google Shape;51;p:notes"/>
+          <p:cNvSpPr>
+            <a:spLocks noGrp="1" noRot="1" noChangeAspect="1"/>
+          </p:cNvSpPr>
+          <p:nvPr>
+            <p:ph type="sldImg" idx="2"/>
+          </p:nvPr>
+        </p:nvSpPr>
+        <p:spPr>
+          <a:xfrm>
+            <a:off x="381000" y="685800"/>
+            <a:ext cx="6096000" cy="3429000"/>
+          </a:xfrm>
+          <a:custGeom>
+            <a:avLst/>
+            <a:gdLst/>
+            <a:ahLst/>
+            <a:cxnLst/>
+            <a:rect l="l" t="t" r="r" b="b"/>
+            <a:pathLst>
+              <a:path w="120000" h="120000" extrusionOk="0">
+                <a:moveTo>
+                  <a:pt x="0" y="0"/>
+                </a:moveTo>
+                <a:lnTo>
+                  <a:pt x="120000" y="0"/>
+                </a:lnTo>
+                <a:lnTo>
+                  <a:pt x="120000" y="120000"/>
+                </a:lnTo>
+                <a:lnTo>
+                  <a:pt x="0" y="120000"/>
+                </a:lnTo>
+                <a:close/>
+              </a:path>
+            </a:pathLst>
+          </a:custGeom>
+        </p:spPr>
+      </p:sp>
+      <p:sp>
+        <p:nvSpPr>
+          <p:cNvPr id="52" name="Google Shape;52;p:notes"/>
+          <p:cNvSpPr txBox="1">
+            <a:spLocks noGrp="1"/>
+          </p:cNvSpPr>
+          <p:nvPr>
+            <p:ph type="body" idx="1"/>
+          </p:nvPr>
+        </p:nvSpPr>
+        <p:spPr>
+          <a:xfrm>
+            <a:off x="685800" y="4343400"/>
+            <a:ext cx="5486400" cy="4114800"/>
+          </a:xfrm>
+          <a:prstGeom prst="rect">
+            <a:avLst/>
+          </a:prstGeom>
+        </p:spPr>
+        <p:txBody>
+          <a:bodyPr spcFirstLastPara="1" wrap="square" lIns="91425" tIns="91425" rIns="91425" bIns="91425" anchor="t" anchorCtr="0">
+            <a:noAutofit/>
+          </a:bodyPr>
+          <a:lstStyle/>
+          <a:p>
+            <a:pPr marL="0" lvl="0" indent="0" algn="l" rtl="0">
+              <a:spcBef>
+                <a:spcPts val="0"/>
+              </a:spcBef>
+              <a:spcAft>
+                <a:spcPts val="0"/>
+              </a:spcAft>
+              <a:buNone/>
+            </a:pPr>
+            <a:endParaRPr/>
+          </a:p>
+        </p:txBody>
+      </p:sp>
+    </p:spTree>
+  </p:cSld>
+  <p:clrMapOvr>
+    <a:masterClrMapping/>
+  </p:clrMapOvr>
+</p:notes>
+</file>
+
+<file path=ppt/notesSlides/notesSlide2.xml><?xml version="1.0" encoding="utf-8"?>
+<p:notes xmlns:a="http://schemas.openxmlformats.org/drawingml/2006/main" xmlns:r="http://schemas.openxmlformats.org/officeDocument/2006/relationships" xmlns:p="http://schemas.openxmlformats.org/presentationml/2006/main">
+  <p:cSld>
+    <p:spTree>
+      <p:nvGrpSpPr>
+        <p:cNvPr id="1" name=""/>
+        <p:cNvGrpSpPr/>
+        <p:nvPr/>
+      </p:nvGrpSpPr>
+      <p:grpSpPr>
+        <a:xfrm>
+          <a:off x="0" y="0"/>
+          <a:ext cx="0" cy="0"/>
+          <a:chOff x="0" y="0"/>
+          <a:chExt cx="0" cy="0"/>
+        </a:xfrm>
+      </p:grpSpPr>
+      <p:sp>
+        <p:nvSpPr>
+          <p:cNvPr id="2" name="Slide Image Placeholder 1"/>
+          <p:cNvSpPr>
+            <a:spLocks noGrp="1" noRot="1" noChangeAspect="1"/>
+          </p:cNvSpPr>
+          <p:nvPr>
+            <p:ph type="sldImg"/>
+          </p:nvPr>
+        </p:nvSpPr>
+        <p:spPr/>
+      </p:sp>
+      <p:sp>
+        <p:nvSpPr>
+          <p:cNvPr id="3" name="Notes Placeholder 2"/>
+          <p:cNvSpPr>
+            <a:spLocks noGrp="1"/>
+          </p:cNvSpPr>
+          <p:nvPr>
+            <p:ph type="body" idx="1"/>
+          </p:nvPr>
+        </p:nvSpPr>
+        <p:spPr/>
+        <p:txBody>
+          <a:bodyPr/>
+          <a:lstStyle/>
+          <a:p>
+            <a:endParaRPr lang="en-GB" dirty="0"/>
+          </a:p>
+        </p:txBody>
+      </p:sp>
+      <p:sp>
+        <p:nvSpPr>
+          <p:cNvPr id="4" name="Slide Number Placeholder 3"/>
+          <p:cNvSpPr>
+            <a:spLocks noGrp="1"/>
+          </p:cNvSpPr>
+          <p:nvPr>
+            <p:ph type="sldNum" sz="quarter" idx="5"/>
+          </p:nvPr>
+        </p:nvSpPr>
+        <p:spPr/>
+        <p:txBody>
+          <a:bodyPr/>
+          <a:lstStyle/>
+          <a:p>
+            <a:fld id="{0317239E-B35E-4F10-90B5-31FF182819A9}" type="slidenum">
+              <a:rPr lang="en-GB" smtClean="0"/>
+              <a:t>15</a:t>
+            </a:fld>
+            <a:endParaRPr lang="en-GB"/>
+          </a:p>
+        </p:txBody>
+      </p:sp>
+    </p:spTree>
+    <p:extLst>
+      <p:ext uri="{BB962C8B-B14F-4D97-AF65-F5344CB8AC3E}">
+        <p14:creationId xmlns:p14="http://schemas.microsoft.com/office/powerpoint/2010/main" val="3450632651"/>
+      </p:ext>
+    </p:extLst>
+  </p:cSld>
+  <p:clrMapOvr>
+    <a:masterClrMapping/>
+  </p:clrMapOvr>
+</p:notes>
 </file>
 
 <file path=ppt/slideLayouts/slideLayout1.xml><?xml version="1.0" encoding="utf-8"?>
@@ -269,7 +813,7 @@
           <a:p>
             <a:fld id="{CC71322A-ABF9-4314-B9EE-0B625A982925}" type="datetimeFigureOut">
               <a:rPr lang="en-GB" smtClean="0"/>
-              <a:t>30/05/2026</a:t>
+              <a:t>01/06/2026</a:t>
             </a:fld>
             <a:endParaRPr lang="en-GB"/>
           </a:p>
@@ -467,7 +1011,7 @@
           <a:p>
             <a:fld id="{CC71322A-ABF9-4314-B9EE-0B625A982925}" type="datetimeFigureOut">
               <a:rPr lang="en-GB" smtClean="0"/>
-              <a:t>30/05/2026</a:t>
+              <a:t>01/06/2026</a:t>
             </a:fld>
             <a:endParaRPr lang="en-GB"/>
           </a:p>
@@ -675,7 +1219,7 @@
           <a:p>
             <a:fld id="{CC71322A-ABF9-4314-B9EE-0B625A982925}" type="datetimeFigureOut">
               <a:rPr lang="en-GB" smtClean="0"/>
-              <a:t>30/05/2026</a:t>
+              <a:t>01/06/2026</a:t>
             </a:fld>
             <a:endParaRPr lang="en-GB"/>
           </a:p>
@@ -873,7 +1417,7 @@
           <a:p>
             <a:fld id="{CC71322A-ABF9-4314-B9EE-0B625A982925}" type="datetimeFigureOut">
               <a:rPr lang="en-GB" smtClean="0"/>
-              <a:t>30/05/2026</a:t>
+              <a:t>01/06/2026</a:t>
             </a:fld>
             <a:endParaRPr lang="en-GB"/>
           </a:p>
@@ -1148,7 +1692,7 @@
           <a:p>
             <a:fld id="{CC71322A-ABF9-4314-B9EE-0B625A982925}" type="datetimeFigureOut">
               <a:rPr lang="en-GB" smtClean="0"/>
-              <a:t>30/05/2026</a:t>
+              <a:t>01/06/2026</a:t>
             </a:fld>
             <a:endParaRPr lang="en-GB"/>
           </a:p>
@@ -1413,7 +1957,7 @@
           <a:p>
             <a:fld id="{CC71322A-ABF9-4314-B9EE-0B625A982925}" type="datetimeFigureOut">
               <a:rPr lang="en-GB" smtClean="0"/>
-              <a:t>30/05/2026</a:t>
+              <a:t>01/06/2026</a:t>
             </a:fld>
             <a:endParaRPr lang="en-GB"/>
           </a:p>
@@ -1825,7 +2369,7 @@
           <a:p>
             <a:fld id="{CC71322A-ABF9-4314-B9EE-0B625A982925}" type="datetimeFigureOut">
               <a:rPr lang="en-GB" smtClean="0"/>
-              <a:t>30/05/2026</a:t>
+              <a:t>01/06/2026</a:t>
             </a:fld>
             <a:endParaRPr lang="en-GB"/>
           </a:p>
@@ -1966,7 +2510,7 @@
           <a:p>
             <a:fld id="{CC71322A-ABF9-4314-B9EE-0B625A982925}" type="datetimeFigureOut">
               <a:rPr lang="en-GB" smtClean="0"/>
-              <a:t>30/05/2026</a:t>
+              <a:t>01/06/2026</a:t>
             </a:fld>
             <a:endParaRPr lang="en-GB"/>
           </a:p>
@@ -2079,7 +2623,7 @@
           <a:p>
             <a:fld id="{CC71322A-ABF9-4314-B9EE-0B625A982925}" type="datetimeFigureOut">
               <a:rPr lang="en-GB" smtClean="0"/>
-              <a:t>30/05/2026</a:t>
+              <a:t>01/06/2026</a:t>
             </a:fld>
             <a:endParaRPr lang="en-GB"/>
           </a:p>
@@ -2390,7 +2934,7 @@
           <a:p>
             <a:fld id="{CC71322A-ABF9-4314-B9EE-0B625A982925}" type="datetimeFigureOut">
               <a:rPr lang="en-GB" smtClean="0"/>
-              <a:t>30/05/2026</a:t>
+              <a:t>01/06/2026</a:t>
             </a:fld>
             <a:endParaRPr lang="en-GB"/>
           </a:p>
@@ -2678,7 +3222,7 @@
           <a:p>
             <a:fld id="{CC71322A-ABF9-4314-B9EE-0B625A982925}" type="datetimeFigureOut">
               <a:rPr lang="en-GB" smtClean="0"/>
-              <a:t>30/05/2026</a:t>
+              <a:t>01/06/2026</a:t>
             </a:fld>
             <a:endParaRPr lang="en-GB"/>
           </a:p>
@@ -2919,7 +3463,7 @@
           <a:p>
             <a:fld id="{CC71322A-ABF9-4314-B9EE-0B625A982925}" type="datetimeFigureOut">
               <a:rPr lang="en-GB" smtClean="0"/>
-              <a:t>30/05/2026</a:t>
+              <a:t>01/06/2026</a:t>
             </a:fld>
             <a:endParaRPr lang="en-GB"/>
           </a:p>
@@ -3324,7 +3868,7 @@
   <p:cSld>
     <p:spTree>
       <p:nvGrpSpPr>
-        <p:cNvPr id="1" name=""/>
+        <p:cNvPr id="1" name="Shape 53"/>
         <p:cNvGrpSpPr/>
         <p:nvPr/>
       </p:nvGrpSpPr>
@@ -3338,425 +3882,262 @@
       </p:grpSpPr>
       <p:sp>
         <p:nvSpPr>
-          <p:cNvPr id="4" name="Rectangle 3">
-            <a:extLst>
-              <a:ext uri="{FF2B5EF4-FFF2-40B4-BE49-F238E27FC236}">
-                <a16:creationId xmlns:a16="http://schemas.microsoft.com/office/drawing/2014/main" id="{111106FD-301A-837C-6A65-B26753D412DD}"/>
-              </a:ext>
-            </a:extLst>
-          </p:cNvPr>
-          <p:cNvSpPr/>
-          <p:nvPr/>
+          <p:cNvPr id="54" name="Google Shape;54;p13"/>
+          <p:cNvSpPr txBox="1">
+            <a:spLocks noGrp="1"/>
+          </p:cNvSpPr>
+          <p:nvPr>
+            <p:ph type="ctrTitle"/>
+          </p:nvPr>
         </p:nvSpPr>
         <p:spPr>
           <a:xfrm>
-            <a:off x="864158" y="2130250"/>
-            <a:ext cx="2411605" cy="1065125"/>
+            <a:off x="0" y="992767"/>
+            <a:ext cx="12192000" cy="2736800"/>
           </a:xfrm>
           <a:prstGeom prst="rect">
             <a:avLst/>
           </a:prstGeom>
         </p:spPr>
-        <p:style>
-          <a:lnRef idx="2">
-            <a:schemeClr val="accent1">
-              <a:shade val="15000"/>
-            </a:schemeClr>
-          </a:lnRef>
-          <a:fillRef idx="1">
-            <a:schemeClr val="accent1"/>
-          </a:fillRef>
-          <a:effectRef idx="0">
-            <a:schemeClr val="accent1"/>
-          </a:effectRef>
-          <a:fontRef idx="minor">
-            <a:schemeClr val="lt1"/>
-          </a:fontRef>
-        </p:style>
-        <p:txBody>
-          <a:bodyPr rtlCol="0" anchor="ctr"/>
-          <a:lstStyle/>
-          <a:p>
-            <a:pPr algn="ctr"/>
-            <a:r>
-              <a:rPr lang="en-GB" dirty="0" err="1"/>
-              <a:t>Treino</a:t>
-            </a:r>
-            <a:endParaRPr lang="en-GB" dirty="0"/>
-          </a:p>
-          <a:p>
-            <a:pPr algn="ctr"/>
-            <a:r>
-              <a:rPr lang="en-GB" dirty="0"/>
-              <a:t>PPO/DQN</a:t>
-            </a:r>
-          </a:p>
-        </p:txBody>
-      </p:sp>
-      <p:sp>
-        <p:nvSpPr>
-          <p:cNvPr id="5" name="Rectangle 4">
-            <a:extLst>
-              <a:ext uri="{FF2B5EF4-FFF2-40B4-BE49-F238E27FC236}">
-                <a16:creationId xmlns:a16="http://schemas.microsoft.com/office/drawing/2014/main" id="{AED818E8-1CBF-D850-DE5D-7013CE255331}"/>
-              </a:ext>
-            </a:extLst>
-          </p:cNvPr>
-          <p:cNvSpPr/>
-          <p:nvPr/>
+        <p:txBody>
+          <a:bodyPr spcFirstLastPara="1" vert="horz" wrap="square" lIns="121900" tIns="121900" rIns="121900" bIns="121900" rtlCol="0" anchor="b" anchorCtr="0">
+            <a:normAutofit/>
+          </a:bodyPr>
+          <a:lstStyle/>
+          <a:p>
+            <a:pPr>
+              <a:spcBef>
+                <a:spcPts val="0"/>
+              </a:spcBef>
+            </a:pPr>
+            <a:r>
+              <a:rPr lang="pt-PT" sz="7066" b="1" dirty="0"/>
+              <a:t>Dance4Life</a:t>
+            </a:r>
+            <a:endParaRPr sz="7066" b="1" dirty="0"/>
+          </a:p>
+          <a:p>
+            <a:pPr>
+              <a:spcBef>
+                <a:spcPts val="0"/>
+              </a:spcBef>
+            </a:pPr>
+            <a:r>
+              <a:rPr lang="pt-PT" sz="5600" dirty="0"/>
+              <a:t>Envelhecimento </a:t>
+            </a:r>
+            <a:r>
+              <a:rPr lang="pt-PT" sz="5600" dirty="0" err="1"/>
+              <a:t>activo</a:t>
+            </a:r>
+            <a:endParaRPr sz="5600" dirty="0"/>
+          </a:p>
+          <a:p>
+            <a:pPr marL="609585" indent="-529153">
+              <a:spcBef>
+                <a:spcPts val="0"/>
+              </a:spcBef>
+              <a:buSzPts val="2650"/>
+              <a:buChar char="-"/>
+            </a:pPr>
+            <a:r>
+              <a:rPr lang="pt-PT" sz="3533" dirty="0"/>
+              <a:t>Aprendizagem por Reforço-</a:t>
+            </a:r>
+            <a:endParaRPr sz="3533" dirty="0"/>
+          </a:p>
+        </p:txBody>
+      </p:sp>
+      <p:sp>
+        <p:nvSpPr>
+          <p:cNvPr id="55" name="Google Shape;55;p13"/>
+          <p:cNvSpPr txBox="1">
+            <a:spLocks noGrp="1"/>
+          </p:cNvSpPr>
+          <p:nvPr>
+            <p:ph type="subTitle" idx="1"/>
+          </p:nvPr>
         </p:nvSpPr>
         <p:spPr>
           <a:xfrm>
-            <a:off x="3758084" y="2130250"/>
-            <a:ext cx="2773345" cy="1065125"/>
+            <a:off x="0" y="4381133"/>
+            <a:ext cx="12191999" cy="1276717"/>
           </a:xfrm>
           <a:prstGeom prst="rect">
             <a:avLst/>
           </a:prstGeom>
         </p:spPr>
-        <p:style>
-          <a:lnRef idx="2">
-            <a:schemeClr val="accent1">
-              <a:shade val="15000"/>
-            </a:schemeClr>
-          </a:lnRef>
-          <a:fillRef idx="1">
-            <a:schemeClr val="accent1"/>
-          </a:fillRef>
-          <a:effectRef idx="0">
-            <a:schemeClr val="accent1"/>
-          </a:effectRef>
-          <a:fontRef idx="minor">
-            <a:schemeClr val="lt1"/>
-          </a:fontRef>
-        </p:style>
-        <p:txBody>
-          <a:bodyPr rtlCol="0" anchor="ctr"/>
-          <a:lstStyle/>
-          <a:p>
-            <a:pPr algn="ctr"/>
-            <a:r>
-              <a:rPr lang="en-GB" dirty="0"/>
-              <a:t>Export</a:t>
-            </a:r>
-          </a:p>
-          <a:p>
-            <a:pPr algn="ctr"/>
-            <a:r>
-              <a:rPr lang="en-GB" dirty="0"/>
-              <a:t>PPO/DQN</a:t>
-            </a:r>
-          </a:p>
-        </p:txBody>
-      </p:sp>
-      <p:sp>
-        <p:nvSpPr>
-          <p:cNvPr id="6" name="Rectangle 5">
-            <a:extLst>
-              <a:ext uri="{FF2B5EF4-FFF2-40B4-BE49-F238E27FC236}">
-                <a16:creationId xmlns:a16="http://schemas.microsoft.com/office/drawing/2014/main" id="{2FF74502-96DE-AFC9-05F7-200D8376AF71}"/>
-              </a:ext>
-            </a:extLst>
-          </p:cNvPr>
-          <p:cNvSpPr/>
-          <p:nvPr/>
+        <p:txBody>
+          <a:bodyPr spcFirstLastPara="1" vert="horz" wrap="square" lIns="121900" tIns="121900" rIns="121900" bIns="121900" rtlCol="0" anchor="t" anchorCtr="0">
+            <a:normAutofit/>
+          </a:bodyPr>
+          <a:lstStyle/>
+          <a:p>
+            <a:pPr>
+              <a:spcBef>
+                <a:spcPts val="0"/>
+              </a:spcBef>
+            </a:pPr>
+            <a:r>
+              <a:rPr lang="pt-PT" sz="1867" dirty="0"/>
+              <a:t>Carlos </a:t>
+            </a:r>
+            <a:r>
+              <a:rPr lang="pt-PT" sz="1867" dirty="0" err="1"/>
+              <a:t>Bergueira</a:t>
+            </a:r>
+            <a:r>
+              <a:rPr lang="pt-PT" sz="1867" dirty="0"/>
+              <a:t>   		PG11605</a:t>
+            </a:r>
+            <a:endParaRPr sz="1867" dirty="0"/>
+          </a:p>
+          <a:p>
+            <a:pPr>
+              <a:spcBef>
+                <a:spcPts val="0"/>
+              </a:spcBef>
+            </a:pPr>
+            <a:r>
+              <a:rPr lang="pt-PT" sz="1867" dirty="0"/>
+              <a:t>Diego Silva			PG59999</a:t>
+            </a:r>
+            <a:endParaRPr sz="1867" dirty="0"/>
+          </a:p>
+          <a:p>
+            <a:pPr>
+              <a:spcBef>
+                <a:spcPts val="0"/>
+              </a:spcBef>
+            </a:pPr>
+            <a:r>
+              <a:rPr lang="pt-PT" sz="1867" dirty="0"/>
+              <a:t>Filipa Pereira			PG42201</a:t>
+            </a:r>
+            <a:endParaRPr lang="en-GB" sz="1867" dirty="0"/>
+          </a:p>
+          <a:p>
+            <a:pPr>
+              <a:spcBef>
+                <a:spcPts val="0"/>
+              </a:spcBef>
+              <a:buClr>
+                <a:schemeClr val="dk1"/>
+              </a:buClr>
+              <a:buSzPts val="1100"/>
+            </a:pPr>
+            <a:r>
+              <a:rPr lang="en-GB" sz="1867" dirty="0"/>
+              <a:t>Rui Rodrigues			PG 7942</a:t>
+            </a:r>
+          </a:p>
+        </p:txBody>
+      </p:sp>
+      <p:sp>
+        <p:nvSpPr>
+          <p:cNvPr id="56" name="Google Shape;56;p13"/>
+          <p:cNvSpPr txBox="1">
+            <a:spLocks noGrp="1"/>
+          </p:cNvSpPr>
+          <p:nvPr>
+            <p:ph type="subTitle" idx="1"/>
+          </p:nvPr>
         </p:nvSpPr>
         <p:spPr>
           <a:xfrm>
-            <a:off x="864158" y="954593"/>
-            <a:ext cx="5707464" cy="1065125"/>
+            <a:off x="0" y="5853833"/>
+            <a:ext cx="12192000" cy="484400"/>
           </a:xfrm>
           <a:prstGeom prst="rect">
             <a:avLst/>
           </a:prstGeom>
         </p:spPr>
-        <p:style>
-          <a:lnRef idx="2">
-            <a:schemeClr val="accent1">
-              <a:shade val="15000"/>
-            </a:schemeClr>
-          </a:lnRef>
-          <a:fillRef idx="1">
-            <a:schemeClr val="accent1"/>
-          </a:fillRef>
-          <a:effectRef idx="0">
-            <a:schemeClr val="accent1"/>
-          </a:effectRef>
-          <a:fontRef idx="minor">
-            <a:schemeClr val="lt1"/>
-          </a:fontRef>
-        </p:style>
-        <p:txBody>
-          <a:bodyPr rtlCol="0" anchor="ctr"/>
-          <a:lstStyle/>
-          <a:p>
-            <a:pPr algn="ctr"/>
-            <a:r>
-              <a:rPr lang="en-GB" dirty="0"/>
-              <a:t>Python</a:t>
-            </a:r>
-          </a:p>
-        </p:txBody>
-      </p:sp>
-      <p:sp>
-        <p:nvSpPr>
-          <p:cNvPr id="7" name="Rectangle 6">
-            <a:extLst>
-              <a:ext uri="{FF2B5EF4-FFF2-40B4-BE49-F238E27FC236}">
-                <a16:creationId xmlns:a16="http://schemas.microsoft.com/office/drawing/2014/main" id="{83315B09-BFE3-8780-31B3-D9232F990961}"/>
-              </a:ext>
-            </a:extLst>
-          </p:cNvPr>
-          <p:cNvSpPr/>
-          <p:nvPr/>
+        <p:txBody>
+          <a:bodyPr spcFirstLastPara="1" vert="horz" wrap="square" lIns="121900" tIns="121900" rIns="121900" bIns="121900" rtlCol="0" anchor="t" anchorCtr="0">
+            <a:normAutofit lnSpcReduction="10000"/>
+          </a:bodyPr>
+          <a:lstStyle/>
+          <a:p>
+            <a:pPr>
+              <a:spcBef>
+                <a:spcPts val="0"/>
+              </a:spcBef>
+            </a:pPr>
+            <a:r>
+              <a:rPr lang="pt-PT" sz="1867" dirty="0"/>
+              <a:t>Universidade do Minho | Junho 2026</a:t>
+            </a:r>
+            <a:endParaRPr sz="1867" dirty="0"/>
+          </a:p>
+        </p:txBody>
+      </p:sp>
+      <p:sp>
+        <p:nvSpPr>
+          <p:cNvPr id="57" name="Google Shape;57;p13"/>
+          <p:cNvSpPr txBox="1">
+            <a:spLocks noGrp="1"/>
+          </p:cNvSpPr>
+          <p:nvPr>
+            <p:ph type="subTitle" idx="1"/>
+          </p:nvPr>
         </p:nvSpPr>
         <p:spPr>
           <a:xfrm>
-            <a:off x="6861350" y="2130249"/>
-            <a:ext cx="2411605" cy="1065125"/>
+            <a:off x="0" y="3896733"/>
+            <a:ext cx="12192000" cy="484400"/>
           </a:xfrm>
           <a:prstGeom prst="rect">
             <a:avLst/>
           </a:prstGeom>
         </p:spPr>
-        <p:style>
-          <a:lnRef idx="2">
-            <a:schemeClr val="accent1">
-              <a:shade val="15000"/>
-            </a:schemeClr>
-          </a:lnRef>
-          <a:fillRef idx="1">
-            <a:schemeClr val="accent1"/>
-          </a:fillRef>
-          <a:effectRef idx="0">
-            <a:schemeClr val="accent1"/>
-          </a:effectRef>
-          <a:fontRef idx="minor">
-            <a:schemeClr val="lt1"/>
-          </a:fontRef>
-        </p:style>
-        <p:txBody>
-          <a:bodyPr rtlCol="0" anchor="ctr"/>
-          <a:lstStyle/>
-          <a:p>
-            <a:pPr algn="ctr"/>
-            <a:r>
-              <a:rPr lang="en-GB" dirty="0" err="1"/>
-              <a:t>Inferência</a:t>
-            </a:r>
-            <a:endParaRPr lang="en-GB" dirty="0"/>
-          </a:p>
-          <a:p>
-            <a:pPr algn="ctr"/>
-            <a:r>
-              <a:rPr lang="en-GB" dirty="0"/>
-              <a:t>PPO/DQN</a:t>
-            </a:r>
-          </a:p>
-        </p:txBody>
-      </p:sp>
-      <p:sp>
-        <p:nvSpPr>
-          <p:cNvPr id="8" name="Rectangle 7">
-            <a:extLst>
-              <a:ext uri="{FF2B5EF4-FFF2-40B4-BE49-F238E27FC236}">
-                <a16:creationId xmlns:a16="http://schemas.microsoft.com/office/drawing/2014/main" id="{7B8CD537-761D-523F-8ABE-6E45C76F07BE}"/>
-              </a:ext>
-            </a:extLst>
-          </p:cNvPr>
-          <p:cNvSpPr/>
+        <p:txBody>
+          <a:bodyPr spcFirstLastPara="1" vert="horz" wrap="square" lIns="121900" tIns="121900" rIns="121900" bIns="121900" rtlCol="0" anchor="t" anchorCtr="0">
+            <a:normAutofit lnSpcReduction="10000"/>
+          </a:bodyPr>
+          <a:lstStyle/>
+          <a:p>
+            <a:pPr>
+              <a:spcBef>
+                <a:spcPts val="0"/>
+              </a:spcBef>
+            </a:pPr>
+            <a:r>
+              <a:rPr lang="pt-PT" sz="1867" dirty="0"/>
+              <a:t>Mestrado em Inteligência Artificial</a:t>
+            </a:r>
+            <a:endParaRPr sz="1867" dirty="0"/>
+          </a:p>
+        </p:txBody>
+      </p:sp>
+      <p:pic>
+        <p:nvPicPr>
+          <p:cNvPr id="58" name="Google Shape;58;p13"/>
+          <p:cNvPicPr preferRelativeResize="0"/>
           <p:nvPr/>
-        </p:nvSpPr>
+        </p:nvPicPr>
+        <p:blipFill>
+          <a:blip r:embed="rId3">
+            <a:alphaModFix/>
+          </a:blip>
+          <a:stretch>
+            <a:fillRect/>
+          </a:stretch>
+        </p:blipFill>
         <p:spPr>
           <a:xfrm>
-            <a:off x="6861350" y="954593"/>
-            <a:ext cx="2411605" cy="1065125"/>
+            <a:off x="290323" y="164367"/>
+            <a:ext cx="1602486" cy="1656800"/>
           </a:xfrm>
           <a:prstGeom prst="rect">
             <a:avLst/>
           </a:prstGeom>
+          <a:noFill/>
+          <a:ln>
+            <a:noFill/>
+          </a:ln>
         </p:spPr>
-        <p:style>
-          <a:lnRef idx="2">
-            <a:schemeClr val="accent1">
-              <a:shade val="15000"/>
-            </a:schemeClr>
-          </a:lnRef>
-          <a:fillRef idx="1">
-            <a:schemeClr val="accent1"/>
-          </a:fillRef>
-          <a:effectRef idx="0">
-            <a:schemeClr val="accent1"/>
-          </a:effectRef>
-          <a:fontRef idx="minor">
-            <a:schemeClr val="lt1"/>
-          </a:fontRef>
-        </p:style>
-        <p:txBody>
-          <a:bodyPr rtlCol="0" anchor="ctr"/>
-          <a:lstStyle/>
-          <a:p>
-            <a:pPr algn="ctr"/>
-            <a:r>
-              <a:rPr lang="en-GB" dirty="0"/>
-              <a:t>Kotlin/Android</a:t>
-            </a:r>
-          </a:p>
-        </p:txBody>
-      </p:sp>
-      <p:sp>
-        <p:nvSpPr>
-          <p:cNvPr id="9" name="Rectangle 8">
-            <a:extLst>
-              <a:ext uri="{FF2B5EF4-FFF2-40B4-BE49-F238E27FC236}">
-                <a16:creationId xmlns:a16="http://schemas.microsoft.com/office/drawing/2014/main" id="{A44FDE89-6A92-5040-2CB5-A61D64DAAD0B}"/>
-              </a:ext>
-            </a:extLst>
-          </p:cNvPr>
-          <p:cNvSpPr/>
-          <p:nvPr/>
-        </p:nvSpPr>
-        <p:spPr>
-          <a:xfrm>
-            <a:off x="864158" y="3429000"/>
-            <a:ext cx="2441750" cy="761163"/>
-          </a:xfrm>
-          <a:prstGeom prst="rect">
-            <a:avLst/>
-          </a:prstGeom>
-        </p:spPr>
-        <p:style>
-          <a:lnRef idx="2">
-            <a:schemeClr val="accent1">
-              <a:shade val="15000"/>
-            </a:schemeClr>
-          </a:lnRef>
-          <a:fillRef idx="1">
-            <a:schemeClr val="accent1"/>
-          </a:fillRef>
-          <a:effectRef idx="0">
-            <a:schemeClr val="accent1"/>
-          </a:effectRef>
-          <a:fontRef idx="minor">
-            <a:schemeClr val="lt1"/>
-          </a:fontRef>
-        </p:style>
-        <p:txBody>
-          <a:bodyPr rtlCol="0" anchor="ctr"/>
-          <a:lstStyle/>
-          <a:p>
-            <a:pPr algn="ctr"/>
-            <a:r>
-              <a:rPr lang="en-GB" dirty="0"/>
-              <a:t>ZIP</a:t>
-            </a:r>
-          </a:p>
-        </p:txBody>
-      </p:sp>
-      <p:sp>
-        <p:nvSpPr>
-          <p:cNvPr id="10" name="Rectangle 9">
-            <a:extLst>
-              <a:ext uri="{FF2B5EF4-FFF2-40B4-BE49-F238E27FC236}">
-                <a16:creationId xmlns:a16="http://schemas.microsoft.com/office/drawing/2014/main" id="{31D0CEEE-B229-996C-BCD7-E17F822B7333}"/>
-              </a:ext>
-            </a:extLst>
-          </p:cNvPr>
-          <p:cNvSpPr/>
-          <p:nvPr/>
-        </p:nvSpPr>
-        <p:spPr>
-          <a:xfrm>
-            <a:off x="3758083" y="3428999"/>
-            <a:ext cx="2773345" cy="761163"/>
-          </a:xfrm>
-          <a:prstGeom prst="rect">
-            <a:avLst/>
-          </a:prstGeom>
-        </p:spPr>
-        <p:style>
-          <a:lnRef idx="2">
-            <a:schemeClr val="accent1">
-              <a:shade val="15000"/>
-            </a:schemeClr>
-          </a:lnRef>
-          <a:fillRef idx="1">
-            <a:schemeClr val="accent1"/>
-          </a:fillRef>
-          <a:effectRef idx="0">
-            <a:schemeClr val="accent1"/>
-          </a:effectRef>
-          <a:fontRef idx="minor">
-            <a:schemeClr val="lt1"/>
-          </a:fontRef>
-        </p:style>
-        <p:txBody>
-          <a:bodyPr rtlCol="0" anchor="ctr"/>
-          <a:lstStyle/>
-          <a:p>
-            <a:pPr algn="ctr"/>
-            <a:r>
-              <a:rPr lang="en-GB" dirty="0"/>
-              <a:t>ONXX</a:t>
-            </a:r>
-          </a:p>
-        </p:txBody>
-      </p:sp>
-      <p:sp>
-        <p:nvSpPr>
-          <p:cNvPr id="11" name="Rectangle 10">
-            <a:extLst>
-              <a:ext uri="{FF2B5EF4-FFF2-40B4-BE49-F238E27FC236}">
-                <a16:creationId xmlns:a16="http://schemas.microsoft.com/office/drawing/2014/main" id="{2CDE4589-DB79-4648-43AB-3C101C791D3E}"/>
-              </a:ext>
-            </a:extLst>
-          </p:cNvPr>
-          <p:cNvSpPr/>
-          <p:nvPr/>
-        </p:nvSpPr>
-        <p:spPr>
-          <a:xfrm>
-            <a:off x="6861350" y="3428999"/>
-            <a:ext cx="2411605" cy="761163"/>
-          </a:xfrm>
-          <a:prstGeom prst="rect">
-            <a:avLst/>
-          </a:prstGeom>
-        </p:spPr>
-        <p:style>
-          <a:lnRef idx="2">
-            <a:schemeClr val="accent1">
-              <a:shade val="15000"/>
-            </a:schemeClr>
-          </a:lnRef>
-          <a:fillRef idx="1">
-            <a:schemeClr val="accent1"/>
-          </a:fillRef>
-          <a:effectRef idx="0">
-            <a:schemeClr val="accent1"/>
-          </a:effectRef>
-          <a:fontRef idx="minor">
-            <a:schemeClr val="lt1"/>
-          </a:fontRef>
-        </p:style>
-        <p:txBody>
-          <a:bodyPr rtlCol="0" anchor="ctr"/>
-          <a:lstStyle/>
-          <a:p>
-            <a:pPr algn="ctr"/>
-            <a:r>
-              <a:rPr lang="en-GB" dirty="0"/>
-              <a:t>ONXX</a:t>
-            </a:r>
-          </a:p>
-        </p:txBody>
-      </p:sp>
+      </p:pic>
     </p:spTree>
-    <p:extLst>
-      <p:ext uri="{BB962C8B-B14F-4D97-AF65-F5344CB8AC3E}">
-        <p14:creationId xmlns:p14="http://schemas.microsoft.com/office/powerpoint/2010/main" val="3469402568"/>
-      </p:ext>
-    </p:extLst>
   </p:cSld>
   <p:clrMapOvr>
     <a:masterClrMapping/>
@@ -3786,7 +4167,7 @@
           <p:cNvPr id="2" name="Title 1">
             <a:extLst>
               <a:ext uri="{FF2B5EF4-FFF2-40B4-BE49-F238E27FC236}">
-                <a16:creationId xmlns:a16="http://schemas.microsoft.com/office/drawing/2014/main" id="{269FE17F-5290-EA8B-24AD-7B13BF2F600F}"/>
+                <a16:creationId xmlns:a16="http://schemas.microsoft.com/office/drawing/2014/main" id="{854F7593-A67C-CA13-F7E7-EA55C8DD05B6}"/>
               </a:ext>
             </a:extLst>
           </p:cNvPr>
@@ -3804,383 +4185,310 @@
           <a:p>
             <a:r>
               <a:rPr lang="en-GB" dirty="0"/>
-              <a:t>ONNX Export/Android Integration</a:t>
-            </a:r>
-          </a:p>
-        </p:txBody>
-      </p:sp>
-      <p:sp>
-        <p:nvSpPr>
-          <p:cNvPr id="3" name="Content Placeholder 2">
-            <a:extLst>
-              <a:ext uri="{FF2B5EF4-FFF2-40B4-BE49-F238E27FC236}">
-                <a16:creationId xmlns:a16="http://schemas.microsoft.com/office/drawing/2014/main" id="{6936218E-ACB7-E265-7229-481634145DAD}"/>
-              </a:ext>
-            </a:extLst>
-          </p:cNvPr>
-          <p:cNvSpPr>
-            <a:spLocks noGrp="1"/>
+              <a:t>Evaluation</a:t>
+            </a:r>
+          </a:p>
+        </p:txBody>
+      </p:sp>
+      <p:pic>
+        <p:nvPicPr>
+          <p:cNvPr id="6" name="Picture 5">
+            <a:extLst>
+              <a:ext uri="{FF2B5EF4-FFF2-40B4-BE49-F238E27FC236}">
+                <a16:creationId xmlns:a16="http://schemas.microsoft.com/office/drawing/2014/main" id="{5FE1F3F0-CDE6-F29F-5DDA-1F51A27C56B7}"/>
+              </a:ext>
+            </a:extLst>
+          </p:cNvPr>
+          <p:cNvPicPr>
+            <a:picLocks noChangeAspect="1"/>
+          </p:cNvPicPr>
+          <p:nvPr/>
+        </p:nvPicPr>
+        <p:blipFill>
+          <a:blip r:embed="rId2"/>
+          <a:stretch>
+            <a:fillRect/>
+          </a:stretch>
+        </p:blipFill>
+        <p:spPr>
+          <a:xfrm>
+            <a:off x="466725" y="1831165"/>
+            <a:ext cx="4322324" cy="3617135"/>
+          </a:xfrm>
+          <a:prstGeom prst="rect">
+            <a:avLst/>
+          </a:prstGeom>
+        </p:spPr>
+      </p:pic>
+      <p:pic>
+        <p:nvPicPr>
+          <p:cNvPr id="8" name="Picture 7">
+            <a:extLst>
+              <a:ext uri="{FF2B5EF4-FFF2-40B4-BE49-F238E27FC236}">
+                <a16:creationId xmlns:a16="http://schemas.microsoft.com/office/drawing/2014/main" id="{CF100221-A737-6AA9-6B7D-9CC8EB82E449}"/>
+              </a:ext>
+            </a:extLst>
+          </p:cNvPr>
+          <p:cNvPicPr>
+            <a:picLocks noChangeAspect="1"/>
+          </p:cNvPicPr>
+          <p:nvPr/>
+        </p:nvPicPr>
+        <p:blipFill>
+          <a:blip r:embed="rId3"/>
+          <a:stretch>
+            <a:fillRect/>
+          </a:stretch>
+        </p:blipFill>
+        <p:spPr>
+          <a:xfrm>
+            <a:off x="4789049" y="1831165"/>
+            <a:ext cx="3785881" cy="4429550"/>
+          </a:xfrm>
+          <a:prstGeom prst="rect">
+            <a:avLst/>
+          </a:prstGeom>
+        </p:spPr>
+      </p:pic>
+      <p:sp>
+        <p:nvSpPr>
+          <p:cNvPr id="9" name="Content Placeholder 3">
+            <a:extLst>
+              <a:ext uri="{FF2B5EF4-FFF2-40B4-BE49-F238E27FC236}">
+                <a16:creationId xmlns:a16="http://schemas.microsoft.com/office/drawing/2014/main" id="{97561AB4-7DBF-4D37-870B-5130AAB5A643}"/>
+              </a:ext>
+            </a:extLst>
+          </p:cNvPr>
+          <p:cNvSpPr txBox="1">
+            <a:spLocks/>
           </p:cNvSpPr>
-          <p:nvPr>
-            <p:ph sz="half" idx="1"/>
-          </p:nvPr>
-        </p:nvSpPr>
-        <p:spPr/>
-        <p:txBody>
-          <a:bodyPr>
-            <a:normAutofit fontScale="70000" lnSpcReduction="20000"/>
+          <p:nvPr/>
+        </p:nvSpPr>
+        <p:spPr>
+          <a:xfrm>
+            <a:off x="8256149" y="1843055"/>
+            <a:ext cx="3469126" cy="4351338"/>
+          </a:xfrm>
+          <a:prstGeom prst="rect">
+            <a:avLst/>
+          </a:prstGeom>
+        </p:spPr>
+        <p:txBody>
+          <a:bodyPr vert="horz" lIns="91440" tIns="45720" rIns="91440" bIns="45720" rtlCol="0">
+            <a:normAutofit/>
           </a:bodyPr>
-          <a:lstStyle/>
-          <a:p>
-            <a:r>
-              <a:rPr lang="pt-BR" dirty="0"/>
-              <a:t>Após o treino, os modelos Stable-Baselines3 devem ser convertidos para ONNX para utilização na aplicação Android.</a:t>
+          <a:lstStyle>
+            <a:lvl1pPr marL="228600" indent="-228600" algn="l" defTabSz="914400" rtl="0" eaLnBrk="1" latinLnBrk="0" hangingPunct="1">
+              <a:lnSpc>
+                <a:spcPct val="90000"/>
+              </a:lnSpc>
+              <a:spcBef>
+                <a:spcPts val="1000"/>
+              </a:spcBef>
+              <a:buFont typeface="Arial" panose="020B0604020202020204" pitchFamily="34" charset="0"/>
+              <a:buChar char="•"/>
+              <a:defRPr sz="2800" kern="1200">
+                <a:solidFill>
+                  <a:schemeClr val="tx1"/>
+                </a:solidFill>
+                <a:latin typeface="+mn-lt"/>
+                <a:ea typeface="+mn-ea"/>
+                <a:cs typeface="+mn-cs"/>
+              </a:defRPr>
+            </a:lvl1pPr>
+            <a:lvl2pPr marL="685800" indent="-228600" algn="l" defTabSz="914400" rtl="0" eaLnBrk="1" latinLnBrk="0" hangingPunct="1">
+              <a:lnSpc>
+                <a:spcPct val="90000"/>
+              </a:lnSpc>
+              <a:spcBef>
+                <a:spcPts val="500"/>
+              </a:spcBef>
+              <a:buFont typeface="Arial" panose="020B0604020202020204" pitchFamily="34" charset="0"/>
+              <a:buChar char="•"/>
+              <a:defRPr sz="2400" kern="1200">
+                <a:solidFill>
+                  <a:schemeClr val="tx1"/>
+                </a:solidFill>
+                <a:latin typeface="+mn-lt"/>
+                <a:ea typeface="+mn-ea"/>
+                <a:cs typeface="+mn-cs"/>
+              </a:defRPr>
+            </a:lvl2pPr>
+            <a:lvl3pPr marL="1143000" indent="-228600" algn="l" defTabSz="914400" rtl="0" eaLnBrk="1" latinLnBrk="0" hangingPunct="1">
+              <a:lnSpc>
+                <a:spcPct val="90000"/>
+              </a:lnSpc>
+              <a:spcBef>
+                <a:spcPts val="500"/>
+              </a:spcBef>
+              <a:buFont typeface="Arial" panose="020B0604020202020204" pitchFamily="34" charset="0"/>
+              <a:buChar char="•"/>
+              <a:defRPr sz="2000" kern="1200">
+                <a:solidFill>
+                  <a:schemeClr val="tx1"/>
+                </a:solidFill>
+                <a:latin typeface="+mn-lt"/>
+                <a:ea typeface="+mn-ea"/>
+                <a:cs typeface="+mn-cs"/>
+              </a:defRPr>
+            </a:lvl3pPr>
+            <a:lvl4pPr marL="1600200" indent="-228600" algn="l" defTabSz="914400" rtl="0" eaLnBrk="1" latinLnBrk="0" hangingPunct="1">
+              <a:lnSpc>
+                <a:spcPct val="90000"/>
+              </a:lnSpc>
+              <a:spcBef>
+                <a:spcPts val="500"/>
+              </a:spcBef>
+              <a:buFont typeface="Arial" panose="020B0604020202020204" pitchFamily="34" charset="0"/>
+              <a:buChar char="•"/>
+              <a:defRPr sz="1800" kern="1200">
+                <a:solidFill>
+                  <a:schemeClr val="tx1"/>
+                </a:solidFill>
+                <a:latin typeface="+mn-lt"/>
+                <a:ea typeface="+mn-ea"/>
+                <a:cs typeface="+mn-cs"/>
+              </a:defRPr>
+            </a:lvl4pPr>
+            <a:lvl5pPr marL="2057400" indent="-228600" algn="l" defTabSz="914400" rtl="0" eaLnBrk="1" latinLnBrk="0" hangingPunct="1">
+              <a:lnSpc>
+                <a:spcPct val="90000"/>
+              </a:lnSpc>
+              <a:spcBef>
+                <a:spcPts val="500"/>
+              </a:spcBef>
+              <a:buFont typeface="Arial" panose="020B0604020202020204" pitchFamily="34" charset="0"/>
+              <a:buChar char="•"/>
+              <a:defRPr sz="1800" kern="1200">
+                <a:solidFill>
+                  <a:schemeClr val="tx1"/>
+                </a:solidFill>
+                <a:latin typeface="+mn-lt"/>
+                <a:ea typeface="+mn-ea"/>
+                <a:cs typeface="+mn-cs"/>
+              </a:defRPr>
+            </a:lvl5pPr>
+            <a:lvl6pPr marL="2514600" indent="-228600" algn="l" defTabSz="914400" rtl="0" eaLnBrk="1" latinLnBrk="0" hangingPunct="1">
+              <a:lnSpc>
+                <a:spcPct val="90000"/>
+              </a:lnSpc>
+              <a:spcBef>
+                <a:spcPts val="500"/>
+              </a:spcBef>
+              <a:buFont typeface="Arial" panose="020B0604020202020204" pitchFamily="34" charset="0"/>
+              <a:buChar char="•"/>
+              <a:defRPr sz="1800" kern="1200">
+                <a:solidFill>
+                  <a:schemeClr val="tx1"/>
+                </a:solidFill>
+                <a:latin typeface="+mn-lt"/>
+                <a:ea typeface="+mn-ea"/>
+                <a:cs typeface="+mn-cs"/>
+              </a:defRPr>
+            </a:lvl6pPr>
+            <a:lvl7pPr marL="2971800" indent="-228600" algn="l" defTabSz="914400" rtl="0" eaLnBrk="1" latinLnBrk="0" hangingPunct="1">
+              <a:lnSpc>
+                <a:spcPct val="90000"/>
+              </a:lnSpc>
+              <a:spcBef>
+                <a:spcPts val="500"/>
+              </a:spcBef>
+              <a:buFont typeface="Arial" panose="020B0604020202020204" pitchFamily="34" charset="0"/>
+              <a:buChar char="•"/>
+              <a:defRPr sz="1800" kern="1200">
+                <a:solidFill>
+                  <a:schemeClr val="tx1"/>
+                </a:solidFill>
+                <a:latin typeface="+mn-lt"/>
+                <a:ea typeface="+mn-ea"/>
+                <a:cs typeface="+mn-cs"/>
+              </a:defRPr>
+            </a:lvl7pPr>
+            <a:lvl8pPr marL="3429000" indent="-228600" algn="l" defTabSz="914400" rtl="0" eaLnBrk="1" latinLnBrk="0" hangingPunct="1">
+              <a:lnSpc>
+                <a:spcPct val="90000"/>
+              </a:lnSpc>
+              <a:spcBef>
+                <a:spcPts val="500"/>
+              </a:spcBef>
+              <a:buFont typeface="Arial" panose="020B0604020202020204" pitchFamily="34" charset="0"/>
+              <a:buChar char="•"/>
+              <a:defRPr sz="1800" kern="1200">
+                <a:solidFill>
+                  <a:schemeClr val="tx1"/>
+                </a:solidFill>
+                <a:latin typeface="+mn-lt"/>
+                <a:ea typeface="+mn-ea"/>
+                <a:cs typeface="+mn-cs"/>
+              </a:defRPr>
+            </a:lvl8pPr>
+            <a:lvl9pPr marL="3886200" indent="-228600" algn="l" defTabSz="914400" rtl="0" eaLnBrk="1" latinLnBrk="0" hangingPunct="1">
+              <a:lnSpc>
+                <a:spcPct val="90000"/>
+              </a:lnSpc>
+              <a:spcBef>
+                <a:spcPts val="500"/>
+              </a:spcBef>
+              <a:buFont typeface="Arial" panose="020B0604020202020204" pitchFamily="34" charset="0"/>
+              <a:buChar char="•"/>
+              <a:defRPr sz="1800" kern="1200">
+                <a:solidFill>
+                  <a:schemeClr val="tx1"/>
+                </a:solidFill>
+                <a:latin typeface="+mn-lt"/>
+                <a:ea typeface="+mn-ea"/>
+                <a:cs typeface="+mn-cs"/>
+              </a:defRPr>
+            </a:lvl9pPr>
+          </a:lstStyle>
+          <a:p>
+            <a:r>
+              <a:rPr lang="en-GB" sz="1800"/>
+              <a:t>Evaluation</a:t>
             </a:r>
           </a:p>
           <a:p>
             <a:pPr lvl="1"/>
             <a:r>
-              <a:rPr lang="en-GB" dirty="0"/>
-              <a:t>export/export_onnx.py</a:t>
+              <a:rPr lang="en-GB" sz="1600"/>
+              <a:t>Comparação entre PPO e DQN:</a:t>
             </a:r>
           </a:p>
           <a:p>
             <a:pPr lvl="2"/>
             <a:r>
-              <a:rPr lang="pt-BR" dirty="0"/>
-              <a:t>Carrega um modelo PPO ou DQN treinado.</a:t>
+              <a:rPr lang="en-GB" sz="1400"/>
+              <a:t>python src/evaluate.py --algo compare --episodes 20</a:t>
+            </a:r>
+          </a:p>
+          <a:p>
+            <a:pPr lvl="1"/>
+            <a:r>
+              <a:rPr lang="en-GB" sz="1600"/>
+              <a:t>Avaliação individual:</a:t>
             </a:r>
           </a:p>
           <a:p>
             <a:pPr lvl="2"/>
             <a:r>
-              <a:rPr lang="pt-BR" dirty="0"/>
-              <a:t>Extrai a rede de inferência.</a:t>
+              <a:rPr lang="en-GB" sz="1400"/>
+              <a:t>python src/evaluate.py --algo ppo --model checkpoints/ppo/best/best_model</a:t>
             </a:r>
           </a:p>
           <a:p>
             <a:pPr lvl="2"/>
             <a:r>
-              <a:rPr lang="pt-BR" dirty="0"/>
-              <a:t>Converte a rede para ONNX.</a:t>
-            </a:r>
-          </a:p>
-          <a:p>
-            <a:pPr lvl="2"/>
-            <a:r>
-              <a:rPr lang="pt-BR" dirty="0"/>
-              <a:t>Gera um ficheiro compatível com ONNX Runtime.</a:t>
-            </a:r>
-          </a:p>
-          <a:p>
-            <a:pPr lvl="2"/>
-            <a:r>
-              <a:rPr lang="pt-BR" dirty="0"/>
-              <a:t>Opcionalmente valida o modelo exportado.</a:t>
-            </a:r>
-          </a:p>
-          <a:p>
-            <a:pPr lvl="2"/>
-            <a:r>
-              <a:rPr lang="pt-BR" dirty="0"/>
-              <a:t>O objetivo é remover a dependência de Python e Stable-Baselines3 em ambiente mobile.</a:t>
-            </a:r>
-          </a:p>
-          <a:p>
-            <a:pPr lvl="1"/>
-            <a:endParaRPr lang="en-GB" dirty="0"/>
-          </a:p>
-        </p:txBody>
-      </p:sp>
-      <p:sp>
-        <p:nvSpPr>
-          <p:cNvPr id="4" name="Content Placeholder 3">
-            <a:extLst>
-              <a:ext uri="{FF2B5EF4-FFF2-40B4-BE49-F238E27FC236}">
-                <a16:creationId xmlns:a16="http://schemas.microsoft.com/office/drawing/2014/main" id="{51BB929C-E800-AB56-FB6F-B19F700A82B1}"/>
-              </a:ext>
-            </a:extLst>
-          </p:cNvPr>
-          <p:cNvSpPr>
-            <a:spLocks noGrp="1"/>
-          </p:cNvSpPr>
-          <p:nvPr>
-            <p:ph sz="half" idx="2"/>
-          </p:nvPr>
-        </p:nvSpPr>
-        <p:spPr/>
-        <p:txBody>
-          <a:bodyPr>
-            <a:normAutofit fontScale="70000" lnSpcReduction="20000"/>
-          </a:bodyPr>
-          <a:lstStyle/>
-          <a:p>
-            <a:r>
-              <a:rPr lang="en-GB" dirty="0"/>
-              <a:t>ONNX Inputs</a:t>
-            </a:r>
-          </a:p>
-          <a:p>
-            <a:pPr lvl="1"/>
-            <a:r>
-              <a:rPr lang="en-GB" dirty="0"/>
-              <a:t>[</a:t>
-            </a:r>
-            <a:r>
-              <a:rPr lang="en-GB" dirty="0" err="1"/>
-              <a:t>activity_level</a:t>
-            </a:r>
-            <a:r>
-              <a:rPr lang="en-GB" dirty="0"/>
-              <a:t>, </a:t>
-            </a:r>
-            <a:r>
-              <a:rPr lang="en-GB" dirty="0" err="1"/>
-              <a:t>physical_fatigue</a:t>
-            </a:r>
-            <a:r>
-              <a:rPr lang="en-GB" dirty="0"/>
-              <a:t>, </a:t>
-            </a:r>
-            <a:r>
-              <a:rPr lang="en-GB" dirty="0" err="1"/>
-              <a:t>irritation_level</a:t>
-            </a:r>
-            <a:r>
-              <a:rPr lang="en-GB" dirty="0"/>
-              <a:t>]</a:t>
-            </a:r>
-          </a:p>
-          <a:p>
-            <a:r>
-              <a:rPr lang="en-GB" dirty="0"/>
-              <a:t>ONNX Outputs</a:t>
-            </a:r>
-          </a:p>
-          <a:p>
-            <a:pPr lvl="1"/>
-            <a:r>
-              <a:rPr lang="en-GB" dirty="0"/>
-              <a:t>[</a:t>
-            </a:r>
-            <a:r>
-              <a:rPr lang="en-GB" dirty="0" err="1"/>
-              <a:t>action_scores</a:t>
-            </a:r>
-            <a:r>
-              <a:rPr lang="en-GB" dirty="0"/>
-              <a:t>]</a:t>
-            </a:r>
-          </a:p>
-          <a:p>
-            <a:pPr lvl="2"/>
-            <a:r>
-              <a:rPr lang="en-GB" dirty="0"/>
-              <a:t>0 = Silence</a:t>
-            </a:r>
-          </a:p>
-          <a:p>
-            <a:pPr lvl="2"/>
-            <a:r>
-              <a:rPr lang="en-GB" dirty="0"/>
-              <a:t>1 = Low Coaching</a:t>
-            </a:r>
-          </a:p>
-          <a:p>
-            <a:pPr lvl="2"/>
-            <a:r>
-              <a:rPr lang="en-GB" dirty="0"/>
-              <a:t>2 = Medium Coaching</a:t>
-            </a:r>
-          </a:p>
-          <a:p>
-            <a:pPr lvl="2"/>
-            <a:r>
-              <a:rPr lang="en-GB" dirty="0"/>
-              <a:t>3 = High Coaching</a:t>
-            </a:r>
-          </a:p>
-          <a:p>
-            <a:r>
-              <a:rPr lang="en-GB" dirty="0"/>
-              <a:t>Android Integration</a:t>
-            </a:r>
-          </a:p>
-          <a:p>
-            <a:pPr lvl="1"/>
-            <a:r>
-              <a:rPr lang="en-GB" dirty="0" err="1"/>
-              <a:t>Após</a:t>
-            </a:r>
-            <a:r>
-              <a:rPr lang="en-GB" dirty="0"/>
-              <a:t> a </a:t>
-            </a:r>
-            <a:r>
-              <a:rPr lang="en-GB" dirty="0" err="1"/>
-              <a:t>exportação</a:t>
-            </a:r>
-            <a:r>
-              <a:rPr lang="en-GB" dirty="0"/>
-              <a:t>, o </a:t>
-            </a:r>
-            <a:r>
-              <a:rPr lang="en-GB" dirty="0" err="1"/>
-              <a:t>ficheiro</a:t>
-            </a:r>
-            <a:r>
-              <a:rPr lang="en-GB" dirty="0"/>
-              <a:t> ONNX </a:t>
-            </a:r>
-            <a:r>
-              <a:rPr lang="en-GB" dirty="0" err="1"/>
-              <a:t>deve</a:t>
-            </a:r>
-            <a:r>
-              <a:rPr lang="en-GB" dirty="0"/>
-              <a:t> ser </a:t>
-            </a:r>
-            <a:r>
-              <a:rPr lang="en-GB" dirty="0" err="1"/>
-              <a:t>copiado</a:t>
-            </a:r>
-            <a:r>
-              <a:rPr lang="en-GB" dirty="0"/>
-              <a:t> </a:t>
-            </a:r>
-            <a:r>
-              <a:rPr lang="en-GB" dirty="0" err="1"/>
-              <a:t>manualmente</a:t>
-            </a:r>
-            <a:r>
-              <a:rPr lang="en-GB" dirty="0"/>
-              <a:t> para:</a:t>
-            </a:r>
-          </a:p>
-          <a:p>
-            <a:pPr lvl="2"/>
-            <a:r>
-              <a:rPr lang="en-GB" dirty="0"/>
-              <a:t>Dance4Life\</a:t>
-            </a:r>
-            <a:r>
-              <a:rPr lang="en-GB" dirty="0" err="1"/>
-              <a:t>AndroidSensor</a:t>
-            </a:r>
-            <a:r>
-              <a:rPr lang="en-GB" dirty="0"/>
-              <a:t>\core\</a:t>
-            </a:r>
-            <a:r>
-              <a:rPr lang="en-GB" dirty="0" err="1"/>
-              <a:t>src</a:t>
-            </a:r>
-            <a:r>
-              <a:rPr lang="en-GB" dirty="0"/>
-              <a:t>\main\java\com\dance4life\core\data\</a:t>
-            </a:r>
-            <a:r>
-              <a:rPr lang="en-GB" dirty="0" err="1"/>
-              <a:t>rl</a:t>
-            </a:r>
-            <a:endParaRPr lang="en-GB" dirty="0"/>
-          </a:p>
-          <a:p>
-            <a:pPr lvl="1"/>
-            <a:r>
-              <a:rPr lang="en-GB" dirty="0"/>
-              <a:t>A </a:t>
-            </a:r>
-            <a:r>
-              <a:rPr lang="en-GB" dirty="0" err="1"/>
-              <a:t>aplicação</a:t>
-            </a:r>
-            <a:r>
-              <a:rPr lang="en-GB" dirty="0"/>
-              <a:t> Android </a:t>
-            </a:r>
-            <a:r>
-              <a:rPr lang="en-GB" dirty="0" err="1"/>
-              <a:t>utiliza</a:t>
-            </a:r>
-            <a:r>
-              <a:rPr lang="en-GB" dirty="0"/>
-              <a:t> </a:t>
-            </a:r>
-            <a:r>
-              <a:rPr lang="en-GB" dirty="0" err="1"/>
-              <a:t>este</a:t>
-            </a:r>
-            <a:r>
-              <a:rPr lang="en-GB" dirty="0"/>
-              <a:t> </a:t>
-            </a:r>
-            <a:r>
-              <a:rPr lang="en-GB" dirty="0" err="1"/>
-              <a:t>modelo</a:t>
-            </a:r>
-            <a:r>
-              <a:rPr lang="en-GB" dirty="0"/>
-              <a:t> para </a:t>
-            </a:r>
-            <a:r>
-              <a:rPr lang="en-GB" dirty="0" err="1"/>
-              <a:t>executar</a:t>
-            </a:r>
-            <a:r>
-              <a:rPr lang="en-GB" dirty="0"/>
-              <a:t> </a:t>
-            </a:r>
-            <a:r>
-              <a:rPr lang="en-GB" dirty="0" err="1"/>
-              <a:t>inferência</a:t>
-            </a:r>
-            <a:r>
-              <a:rPr lang="en-GB" dirty="0"/>
-              <a:t> local </a:t>
-            </a:r>
-            <a:r>
-              <a:rPr lang="en-GB" dirty="0" err="1"/>
-              <a:t>através</a:t>
-            </a:r>
-            <a:r>
-              <a:rPr lang="en-GB" dirty="0"/>
-              <a:t> de ONNX Runtime, </a:t>
-            </a:r>
-            <a:r>
-              <a:rPr lang="en-GB" dirty="0" err="1"/>
-              <a:t>sem</a:t>
-            </a:r>
-            <a:r>
-              <a:rPr lang="en-GB" dirty="0"/>
-              <a:t> </a:t>
-            </a:r>
-            <a:r>
-              <a:rPr lang="en-GB" dirty="0" err="1"/>
-              <a:t>necessidade</a:t>
-            </a:r>
-            <a:r>
-              <a:rPr lang="en-GB" dirty="0"/>
-              <a:t> de Python </a:t>
-            </a:r>
-            <a:r>
-              <a:rPr lang="en-GB" dirty="0" err="1"/>
-              <a:t>ou</a:t>
-            </a:r>
-            <a:r>
-              <a:rPr lang="en-GB" dirty="0"/>
-              <a:t> Stable-Baselines3.</a:t>
-            </a:r>
-          </a:p>
-          <a:p>
-            <a:endParaRPr lang="en-GB" dirty="0"/>
+              <a:rPr lang="en-GB" sz="1400"/>
+              <a:t>python src/evaluate.py --algo dqn --model checkpoints/dqn/best/best_model</a:t>
+            </a:r>
+            <a:endParaRPr lang="en-GB" sz="1400" dirty="0"/>
           </a:p>
         </p:txBody>
       </p:sp>
     </p:spTree>
     <p:extLst>
       <p:ext uri="{BB962C8B-B14F-4D97-AF65-F5344CB8AC3E}">
-        <p14:creationId xmlns:p14="http://schemas.microsoft.com/office/powerpoint/2010/main" val="1376698028"/>
+        <p14:creationId xmlns:p14="http://schemas.microsoft.com/office/powerpoint/2010/main" val="1084427844"/>
       </p:ext>
     </p:extLst>
   </p:cSld>
@@ -4195,13 +4503,7 @@
   <p:cSld>
     <p:spTree>
       <p:nvGrpSpPr>
-        <p:cNvPr id="1" name="">
-          <a:extLst>
-            <a:ext uri="{FF2B5EF4-FFF2-40B4-BE49-F238E27FC236}">
-              <a16:creationId xmlns:a16="http://schemas.microsoft.com/office/drawing/2014/main" id="{3A5ED765-0922-3CFE-BEB0-6FF01AD1A5D7}"/>
-            </a:ext>
-          </a:extLst>
-        </p:cNvPr>
+        <p:cNvPr id="1" name=""/>
         <p:cNvGrpSpPr/>
         <p:nvPr/>
       </p:nvGrpSpPr>
@@ -4218,7 +4520,7 @@
           <p:cNvPr id="2" name="Title 1">
             <a:extLst>
               <a:ext uri="{FF2B5EF4-FFF2-40B4-BE49-F238E27FC236}">
-                <a16:creationId xmlns:a16="http://schemas.microsoft.com/office/drawing/2014/main" id="{7F785F9A-7B26-8E01-9A98-3F5E716C973F}"/>
+                <a16:creationId xmlns:a16="http://schemas.microsoft.com/office/drawing/2014/main" id="{269FE17F-5290-EA8B-24AD-7B13BF2F600F}"/>
               </a:ext>
             </a:extLst>
           </p:cNvPr>
@@ -4226,7 +4528,7 @@
             <a:spLocks noGrp="1"/>
           </p:cNvSpPr>
           <p:nvPr>
-            <p:ph type="ctrTitle"/>
+            <p:ph type="title"/>
           </p:nvPr>
         </p:nvSpPr>
         <p:spPr/>
@@ -4235,19 +4537,18 @@
           <a:lstStyle/>
           <a:p>
             <a:r>
-              <a:rPr lang="en-GB" dirty="0" err="1"/>
-              <a:t>Treino</a:t>
-            </a:r>
-            <a:endParaRPr lang="en-GB" dirty="0"/>
-          </a:p>
-        </p:txBody>
-      </p:sp>
-      <p:sp>
-        <p:nvSpPr>
-          <p:cNvPr id="3" name="Subtitle 2">
-            <a:extLst>
-              <a:ext uri="{FF2B5EF4-FFF2-40B4-BE49-F238E27FC236}">
-                <a16:creationId xmlns:a16="http://schemas.microsoft.com/office/drawing/2014/main" id="{552EC458-9503-C23D-2AF2-CB6B3CDFAFDA}"/>
+              <a:rPr lang="en-GB" dirty="0"/>
+              <a:t>ONNX Export/Android Integration</a:t>
+            </a:r>
+          </a:p>
+        </p:txBody>
+      </p:sp>
+      <p:sp>
+        <p:nvSpPr>
+          <p:cNvPr id="3" name="Content Placeholder 2">
+            <a:extLst>
+              <a:ext uri="{FF2B5EF4-FFF2-40B4-BE49-F238E27FC236}">
+                <a16:creationId xmlns:a16="http://schemas.microsoft.com/office/drawing/2014/main" id="{6936218E-ACB7-E265-7229-481634145DAD}"/>
               </a:ext>
             </a:extLst>
           </p:cNvPr>
@@ -4255,22 +4556,365 @@
             <a:spLocks noGrp="1"/>
           </p:cNvSpPr>
           <p:nvPr>
-            <p:ph type="subTitle" idx="1"/>
+            <p:ph sz="half" idx="1"/>
           </p:nvPr>
         </p:nvSpPr>
         <p:spPr/>
         <p:txBody>
-          <a:bodyPr/>
-          <a:lstStyle/>
-          <a:p>
-            <a:endParaRPr lang="en-GB"/>
+          <a:bodyPr>
+            <a:normAutofit fontScale="70000" lnSpcReduction="20000"/>
+          </a:bodyPr>
+          <a:lstStyle/>
+          <a:p>
+            <a:r>
+              <a:rPr lang="pt-BR" dirty="0"/>
+              <a:t>Após o treino, os modelos Stable-Baselines3 devem ser convertidos para ONNX para utilização na aplicação Android.</a:t>
+            </a:r>
+          </a:p>
+          <a:p>
+            <a:pPr lvl="1"/>
+            <a:r>
+              <a:rPr lang="en-GB" dirty="0"/>
+              <a:t>export/export_onnx.py</a:t>
+            </a:r>
+          </a:p>
+          <a:p>
+            <a:pPr lvl="2"/>
+            <a:r>
+              <a:rPr lang="pt-BR" dirty="0"/>
+              <a:t>Carrega um modelo PPO ou DQN treinado.</a:t>
+            </a:r>
+          </a:p>
+          <a:p>
+            <a:pPr lvl="2"/>
+            <a:r>
+              <a:rPr lang="pt-BR" dirty="0"/>
+              <a:t>Extrai a rede de inferência.</a:t>
+            </a:r>
+          </a:p>
+          <a:p>
+            <a:pPr lvl="2"/>
+            <a:r>
+              <a:rPr lang="pt-BR" dirty="0"/>
+              <a:t>Converte a rede para ONNX.</a:t>
+            </a:r>
+          </a:p>
+          <a:p>
+            <a:pPr lvl="2"/>
+            <a:r>
+              <a:rPr lang="pt-BR" dirty="0"/>
+              <a:t>Gera um ficheiro compatível com ONNX Runtime.</a:t>
+            </a:r>
+          </a:p>
+          <a:p>
+            <a:pPr lvl="2"/>
+            <a:r>
+              <a:rPr lang="pt-BR" dirty="0"/>
+              <a:t>Opcionalmente valida o modelo exportado.</a:t>
+            </a:r>
+          </a:p>
+          <a:p>
+            <a:pPr lvl="2"/>
+            <a:r>
+              <a:rPr lang="pt-BR" dirty="0"/>
+              <a:t>O objetivo é remover a dependência de Python e Stable-Baselines3 em ambiente mobile.</a:t>
+            </a:r>
+          </a:p>
+          <a:p>
+            <a:pPr lvl="1"/>
+            <a:endParaRPr lang="en-GB" dirty="0"/>
+          </a:p>
+        </p:txBody>
+      </p:sp>
+      <p:sp>
+        <p:nvSpPr>
+          <p:cNvPr id="4" name="Content Placeholder 3">
+            <a:extLst>
+              <a:ext uri="{FF2B5EF4-FFF2-40B4-BE49-F238E27FC236}">
+                <a16:creationId xmlns:a16="http://schemas.microsoft.com/office/drawing/2014/main" id="{51BB929C-E800-AB56-FB6F-B19F700A82B1}"/>
+              </a:ext>
+            </a:extLst>
+          </p:cNvPr>
+          <p:cNvSpPr>
+            <a:spLocks noGrp="1"/>
+          </p:cNvSpPr>
+          <p:nvPr>
+            <p:ph sz="half" idx="2"/>
+          </p:nvPr>
+        </p:nvSpPr>
+        <p:spPr/>
+        <p:txBody>
+          <a:bodyPr>
+            <a:normAutofit fontScale="70000" lnSpcReduction="20000"/>
+          </a:bodyPr>
+          <a:lstStyle/>
+          <a:p>
+            <a:r>
+              <a:rPr lang="en-GB" dirty="0"/>
+              <a:t>ONNX Inputs</a:t>
+            </a:r>
+          </a:p>
+          <a:p>
+            <a:pPr lvl="1"/>
+            <a:r>
+              <a:rPr lang="en-GB" dirty="0"/>
+              <a:t>[</a:t>
+            </a:r>
+            <a:r>
+              <a:rPr lang="en-GB" dirty="0" err="1"/>
+              <a:t>activity_level</a:t>
+            </a:r>
+            <a:r>
+              <a:rPr lang="en-GB" dirty="0"/>
+              <a:t>, </a:t>
+            </a:r>
+            <a:r>
+              <a:rPr lang="en-GB" dirty="0" err="1"/>
+              <a:t>physical_fatigue</a:t>
+            </a:r>
+            <a:r>
+              <a:rPr lang="en-GB" dirty="0"/>
+              <a:t>, </a:t>
+            </a:r>
+            <a:r>
+              <a:rPr lang="en-GB" dirty="0" err="1"/>
+              <a:t>irritation_level</a:t>
+            </a:r>
+            <a:r>
+              <a:rPr lang="en-GB" dirty="0"/>
+              <a:t>]</a:t>
+            </a:r>
+          </a:p>
+          <a:p>
+            <a:r>
+              <a:rPr lang="en-GB" dirty="0"/>
+              <a:t>ONNX Outputs</a:t>
+            </a:r>
+          </a:p>
+          <a:p>
+            <a:pPr lvl="1"/>
+            <a:r>
+              <a:rPr lang="en-GB" dirty="0"/>
+              <a:t>[</a:t>
+            </a:r>
+            <a:r>
+              <a:rPr lang="en-GB" dirty="0" err="1"/>
+              <a:t>action_scores</a:t>
+            </a:r>
+            <a:r>
+              <a:rPr lang="en-GB" dirty="0"/>
+              <a:t>]</a:t>
+            </a:r>
+          </a:p>
+          <a:p>
+            <a:pPr lvl="2"/>
+            <a:r>
+              <a:rPr lang="en-GB" dirty="0"/>
+              <a:t>0 = Silence</a:t>
+            </a:r>
+          </a:p>
+          <a:p>
+            <a:pPr lvl="2"/>
+            <a:r>
+              <a:rPr lang="en-GB" dirty="0"/>
+              <a:t>1 = Low Coaching</a:t>
+            </a:r>
+          </a:p>
+          <a:p>
+            <a:pPr lvl="2"/>
+            <a:r>
+              <a:rPr lang="en-GB" dirty="0"/>
+              <a:t>2 = Medium Coaching</a:t>
+            </a:r>
+          </a:p>
+          <a:p>
+            <a:pPr lvl="2"/>
+            <a:r>
+              <a:rPr lang="en-GB" dirty="0"/>
+              <a:t>3 = High Coaching</a:t>
+            </a:r>
+          </a:p>
+          <a:p>
+            <a:r>
+              <a:rPr lang="en-GB" dirty="0"/>
+              <a:t>Android Integration</a:t>
+            </a:r>
+          </a:p>
+          <a:p>
+            <a:pPr lvl="1"/>
+            <a:r>
+              <a:rPr lang="en-GB" dirty="0" err="1"/>
+              <a:t>Após</a:t>
+            </a:r>
+            <a:r>
+              <a:rPr lang="en-GB" dirty="0"/>
+              <a:t> a </a:t>
+            </a:r>
+            <a:r>
+              <a:rPr lang="en-GB" dirty="0" err="1"/>
+              <a:t>exportação</a:t>
+            </a:r>
+            <a:r>
+              <a:rPr lang="en-GB" dirty="0"/>
+              <a:t>, o </a:t>
+            </a:r>
+            <a:r>
+              <a:rPr lang="en-GB" dirty="0" err="1"/>
+              <a:t>ficheiro</a:t>
+            </a:r>
+            <a:r>
+              <a:rPr lang="en-GB" dirty="0"/>
+              <a:t> ONNX </a:t>
+            </a:r>
+            <a:r>
+              <a:rPr lang="en-GB" dirty="0" err="1"/>
+              <a:t>deve</a:t>
+            </a:r>
+            <a:r>
+              <a:rPr lang="en-GB" dirty="0"/>
+              <a:t> ser </a:t>
+            </a:r>
+            <a:r>
+              <a:rPr lang="en-GB" dirty="0" err="1"/>
+              <a:t>copiado</a:t>
+            </a:r>
+            <a:r>
+              <a:rPr lang="en-GB" dirty="0"/>
+              <a:t> </a:t>
+            </a:r>
+            <a:r>
+              <a:rPr lang="en-GB" dirty="0" err="1"/>
+              <a:t>manualmente</a:t>
+            </a:r>
+            <a:r>
+              <a:rPr lang="en-GB" dirty="0"/>
+              <a:t> para:</a:t>
+            </a:r>
+          </a:p>
+          <a:p>
+            <a:pPr lvl="2"/>
+            <a:r>
+              <a:rPr lang="en-GB" dirty="0"/>
+              <a:t>Dance4Life\</a:t>
+            </a:r>
+            <a:r>
+              <a:rPr lang="en-GB" dirty="0" err="1"/>
+              <a:t>AndroidSensor</a:t>
+            </a:r>
+            <a:r>
+              <a:rPr lang="en-GB" dirty="0"/>
+              <a:t>\core\</a:t>
+            </a:r>
+            <a:r>
+              <a:rPr lang="en-GB" dirty="0" err="1"/>
+              <a:t>src</a:t>
+            </a:r>
+            <a:r>
+              <a:rPr lang="en-GB" dirty="0"/>
+              <a:t>\main\java\com\dance4life\core\data\</a:t>
+            </a:r>
+            <a:r>
+              <a:rPr lang="en-GB" dirty="0" err="1"/>
+              <a:t>rl</a:t>
+            </a:r>
+            <a:endParaRPr lang="en-GB" dirty="0"/>
+          </a:p>
+          <a:p>
+            <a:pPr lvl="1"/>
+            <a:r>
+              <a:rPr lang="en-GB" dirty="0"/>
+              <a:t>A </a:t>
+            </a:r>
+            <a:r>
+              <a:rPr lang="en-GB" dirty="0" err="1"/>
+              <a:t>aplicação</a:t>
+            </a:r>
+            <a:r>
+              <a:rPr lang="en-GB" dirty="0"/>
+              <a:t> Android </a:t>
+            </a:r>
+            <a:r>
+              <a:rPr lang="en-GB" dirty="0" err="1"/>
+              <a:t>utiliza</a:t>
+            </a:r>
+            <a:r>
+              <a:rPr lang="en-GB" dirty="0"/>
+              <a:t> </a:t>
+            </a:r>
+            <a:r>
+              <a:rPr lang="en-GB" dirty="0" err="1"/>
+              <a:t>este</a:t>
+            </a:r>
+            <a:r>
+              <a:rPr lang="en-GB" dirty="0"/>
+              <a:t> </a:t>
+            </a:r>
+            <a:r>
+              <a:rPr lang="en-GB" dirty="0" err="1"/>
+              <a:t>modelo</a:t>
+            </a:r>
+            <a:r>
+              <a:rPr lang="en-GB" dirty="0"/>
+              <a:t> para </a:t>
+            </a:r>
+            <a:r>
+              <a:rPr lang="en-GB" dirty="0" err="1"/>
+              <a:t>executar</a:t>
+            </a:r>
+            <a:r>
+              <a:rPr lang="en-GB" dirty="0"/>
+              <a:t> </a:t>
+            </a:r>
+            <a:r>
+              <a:rPr lang="en-GB" dirty="0" err="1"/>
+              <a:t>inferência</a:t>
+            </a:r>
+            <a:r>
+              <a:rPr lang="en-GB" dirty="0"/>
+              <a:t> local </a:t>
+            </a:r>
+            <a:r>
+              <a:rPr lang="en-GB" dirty="0" err="1"/>
+              <a:t>através</a:t>
+            </a:r>
+            <a:r>
+              <a:rPr lang="en-GB" dirty="0"/>
+              <a:t> de ONNX Runtime, </a:t>
+            </a:r>
+            <a:r>
+              <a:rPr lang="en-GB" dirty="0" err="1"/>
+              <a:t>sem</a:t>
+            </a:r>
+            <a:r>
+              <a:rPr lang="en-GB" dirty="0"/>
+              <a:t> </a:t>
+            </a:r>
+            <a:r>
+              <a:rPr lang="en-GB" dirty="0" err="1"/>
+              <a:t>necessidade</a:t>
+            </a:r>
+            <a:r>
+              <a:rPr lang="en-GB" dirty="0"/>
+              <a:t> de Python </a:t>
+            </a:r>
+            <a:r>
+              <a:rPr lang="en-GB" dirty="0" err="1"/>
+              <a:t>ou</a:t>
+            </a:r>
+            <a:r>
+              <a:rPr lang="en-GB" dirty="0"/>
+              <a:t> Stable-Baselines3.</a:t>
+            </a:r>
+          </a:p>
+          <a:p>
+            <a:endParaRPr lang="en-GB" dirty="0"/>
           </a:p>
         </p:txBody>
       </p:sp>
     </p:spTree>
     <p:extLst>
       <p:ext uri="{BB962C8B-B14F-4D97-AF65-F5344CB8AC3E}">
-        <p14:creationId xmlns:p14="http://schemas.microsoft.com/office/powerpoint/2010/main" val="1096411528"/>
+        <p14:creationId xmlns:p14="http://schemas.microsoft.com/office/powerpoint/2010/main" val="1376698028"/>
       </p:ext>
     </p:extLst>
   </p:cSld>
@@ -4319,7 +4963,7 @@
         </p:blipFill>
         <p:spPr>
           <a:xfrm>
-            <a:off x="595402" y="1873331"/>
+            <a:off x="812776" y="1844756"/>
             <a:ext cx="2108233" cy="4602480"/>
           </a:xfrm>
           <a:prstGeom prst="rect">
@@ -4956,7 +5600,19 @@
           <a:bodyPr/>
           <a:lstStyle/>
           <a:p>
-            <a:endParaRPr lang="en-GB"/>
+            <a:r>
+              <a:rPr lang="en-GB" b="1" dirty="0"/>
+              <a:t>Reinforcement Learning Files, </a:t>
+            </a:r>
+            <a:r>
+              <a:rPr lang="en-GB" b="1" dirty="0" err="1"/>
+              <a:t>Pipline</a:t>
+            </a:r>
+            <a:r>
+              <a:rPr lang="en-GB" b="1" dirty="0"/>
+              <a:t>, Technology Stack</a:t>
+            </a:r>
+            <a:endParaRPr lang="en-GB" dirty="0"/>
           </a:p>
         </p:txBody>
       </p:sp>
@@ -5171,90 +5827,6 @@
   <p:cSld>
     <p:spTree>
       <p:nvGrpSpPr>
-        <p:cNvPr id="1" name=""/>
-        <p:cNvGrpSpPr/>
-        <p:nvPr/>
-      </p:nvGrpSpPr>
-      <p:grpSpPr>
-        <a:xfrm>
-          <a:off x="0" y="0"/>
-          <a:ext cx="0" cy="0"/>
-          <a:chOff x="0" y="0"/>
-          <a:chExt cx="0" cy="0"/>
-        </a:xfrm>
-      </p:grpSpPr>
-      <p:sp>
-        <p:nvSpPr>
-          <p:cNvPr id="2" name="Title 1">
-            <a:extLst>
-              <a:ext uri="{FF2B5EF4-FFF2-40B4-BE49-F238E27FC236}">
-                <a16:creationId xmlns:a16="http://schemas.microsoft.com/office/drawing/2014/main" id="{267A59B7-32AC-8EEB-06D6-8F9A09661AF8}"/>
-              </a:ext>
-            </a:extLst>
-          </p:cNvPr>
-          <p:cNvSpPr>
-            <a:spLocks noGrp="1"/>
-          </p:cNvSpPr>
-          <p:nvPr>
-            <p:ph type="ctrTitle"/>
-          </p:nvPr>
-        </p:nvSpPr>
-        <p:spPr/>
-        <p:txBody>
-          <a:bodyPr/>
-          <a:lstStyle/>
-          <a:p>
-            <a:r>
-              <a:rPr lang="en-GB" dirty="0" err="1"/>
-              <a:t>Inferência</a:t>
-            </a:r>
-            <a:endParaRPr lang="en-GB" dirty="0"/>
-          </a:p>
-        </p:txBody>
-      </p:sp>
-      <p:sp>
-        <p:nvSpPr>
-          <p:cNvPr id="3" name="Subtitle 2">
-            <a:extLst>
-              <a:ext uri="{FF2B5EF4-FFF2-40B4-BE49-F238E27FC236}">
-                <a16:creationId xmlns:a16="http://schemas.microsoft.com/office/drawing/2014/main" id="{4FED7F29-2E34-1DDB-ACA6-2C9CA63B1744}"/>
-              </a:ext>
-            </a:extLst>
-          </p:cNvPr>
-          <p:cNvSpPr>
-            <a:spLocks noGrp="1"/>
-          </p:cNvSpPr>
-          <p:nvPr>
-            <p:ph type="subTitle" idx="1"/>
-          </p:nvPr>
-        </p:nvSpPr>
-        <p:spPr/>
-        <p:txBody>
-          <a:bodyPr/>
-          <a:lstStyle/>
-          <a:p>
-            <a:endParaRPr lang="en-GB"/>
-          </a:p>
-        </p:txBody>
-      </p:sp>
-    </p:spTree>
-    <p:extLst>
-      <p:ext uri="{BB962C8B-B14F-4D97-AF65-F5344CB8AC3E}">
-        <p14:creationId xmlns:p14="http://schemas.microsoft.com/office/powerpoint/2010/main" val="3713343777"/>
-      </p:ext>
-    </p:extLst>
-  </p:cSld>
-  <p:clrMapOvr>
-    <a:masterClrMapping/>
-  </p:clrMapOvr>
-</p:sld>
-</file>
-
-<file path=ppt/slides/slide14.xml><?xml version="1.0" encoding="utf-8"?>
-<p:sld xmlns:a="http://schemas.openxmlformats.org/drawingml/2006/main" xmlns:r="http://schemas.openxmlformats.org/officeDocument/2006/relationships" xmlns:p="http://schemas.openxmlformats.org/presentationml/2006/main">
-  <p:cSld>
-    <p:spTree>
-      <p:nvGrpSpPr>
         <p:cNvPr id="1" name="">
           <a:extLst>
             <a:ext uri="{FF2B5EF4-FFF2-40B4-BE49-F238E27FC236}">
@@ -5295,8 +5867,8 @@
         </p:blipFill>
         <p:spPr>
           <a:xfrm>
-            <a:off x="327071" y="928302"/>
-            <a:ext cx="2972215" cy="4391638"/>
+            <a:off x="955858" y="1857374"/>
+            <a:ext cx="2343428" cy="3462565"/>
           </a:xfrm>
           <a:prstGeom prst="rect">
             <a:avLst/>
@@ -5317,8 +5889,8 @@
         </p:nvSpPr>
         <p:spPr>
           <a:xfrm>
-            <a:off x="1115568" y="2519859"/>
-            <a:ext cx="2183718" cy="305637"/>
+            <a:off x="1562099" y="3080778"/>
+            <a:ext cx="1737187" cy="301752"/>
           </a:xfrm>
           <a:prstGeom prst="rect">
             <a:avLst/>
@@ -5369,7 +5941,7 @@
         </p:nvSpPr>
         <p:spPr>
           <a:xfrm>
-            <a:off x="2642616" y="2195432"/>
+            <a:off x="2699766" y="2709782"/>
             <a:ext cx="292608" cy="301752"/>
           </a:xfrm>
           <a:prstGeom prst="ellipse">
@@ -5522,8 +6094,8 @@
         </p:blipFill>
         <p:spPr>
           <a:xfrm>
-            <a:off x="4215412" y="924873"/>
-            <a:ext cx="7864500" cy="4915312"/>
+            <a:off x="5848350" y="1945459"/>
+            <a:ext cx="6231562" cy="3894726"/>
           </a:xfrm>
           <a:prstGeom prst="rect">
             <a:avLst/>
@@ -5544,8 +6116,8 @@
         </p:nvSpPr>
         <p:spPr>
           <a:xfrm>
-            <a:off x="4420742" y="2971302"/>
-            <a:ext cx="7659169" cy="962523"/>
+            <a:off x="6023506" y="3571875"/>
+            <a:ext cx="6056405" cy="781050"/>
           </a:xfrm>
           <a:prstGeom prst="rect">
             <a:avLst/>
@@ -5596,7 +6168,7 @@
         </p:nvSpPr>
         <p:spPr>
           <a:xfrm>
-            <a:off x="10119741" y="3080777"/>
+            <a:off x="11453241" y="3255276"/>
             <a:ext cx="292608" cy="301752"/>
           </a:xfrm>
           <a:prstGeom prst="ellipse">
@@ -5655,8 +6227,8 @@
         </p:nvSpPr>
         <p:spPr>
           <a:xfrm>
-            <a:off x="4420742" y="4114544"/>
-            <a:ext cx="5504308" cy="1725641"/>
+            <a:off x="6023506" y="4416296"/>
+            <a:ext cx="4282543" cy="1423889"/>
           </a:xfrm>
           <a:prstGeom prst="rect">
             <a:avLst/>
@@ -5707,7 +6279,7 @@
         </p:nvSpPr>
         <p:spPr>
           <a:xfrm>
-            <a:off x="9215050" y="4826488"/>
+            <a:off x="10334901" y="5018187"/>
             <a:ext cx="292608" cy="301752"/>
           </a:xfrm>
           <a:prstGeom prst="ellipse">
@@ -5752,10 +6324,343 @@
           </a:p>
         </p:txBody>
       </p:sp>
+      <p:sp>
+        <p:nvSpPr>
+          <p:cNvPr id="2" name="Title 25">
+            <a:extLst>
+              <a:ext uri="{FF2B5EF4-FFF2-40B4-BE49-F238E27FC236}">
+                <a16:creationId xmlns:a16="http://schemas.microsoft.com/office/drawing/2014/main" id="{72693AD6-B10F-A328-3E31-877D0D3D56BE}"/>
+              </a:ext>
+            </a:extLst>
+          </p:cNvPr>
+          <p:cNvSpPr>
+            <a:spLocks noGrp="1"/>
+          </p:cNvSpPr>
+          <p:nvPr>
+            <p:ph type="title"/>
+          </p:nvPr>
+        </p:nvSpPr>
+        <p:spPr>
+          <a:xfrm>
+            <a:off x="838200" y="382189"/>
+            <a:ext cx="10515600" cy="1325563"/>
+          </a:xfrm>
+        </p:spPr>
+        <p:txBody>
+          <a:bodyPr/>
+          <a:lstStyle/>
+          <a:p>
+            <a:r>
+              <a:rPr lang="en-GB" b="1" dirty="0"/>
+              <a:t>Reinforcement Learning Android implementation</a:t>
+            </a:r>
+            <a:endParaRPr lang="en-GB" dirty="0"/>
+          </a:p>
+        </p:txBody>
+      </p:sp>
     </p:spTree>
     <p:extLst>
       <p:ext uri="{BB962C8B-B14F-4D97-AF65-F5344CB8AC3E}">
         <p14:creationId xmlns:p14="http://schemas.microsoft.com/office/powerpoint/2010/main" val="3488768641"/>
+      </p:ext>
+    </p:extLst>
+  </p:cSld>
+  <p:clrMapOvr>
+    <a:masterClrMapping/>
+  </p:clrMapOvr>
+</p:sld>
+</file>
+
+<file path=ppt/slides/slide14.xml><?xml version="1.0" encoding="utf-8"?>
+<p:sld xmlns:a="http://schemas.openxmlformats.org/drawingml/2006/main" xmlns:r="http://schemas.openxmlformats.org/officeDocument/2006/relationships" xmlns:p="http://schemas.openxmlformats.org/presentationml/2006/main">
+  <p:cSld>
+    <p:spTree>
+      <p:nvGrpSpPr>
+        <p:cNvPr id="1" name=""/>
+        <p:cNvGrpSpPr/>
+        <p:nvPr/>
+      </p:nvGrpSpPr>
+      <p:grpSpPr>
+        <a:xfrm>
+          <a:off x="0" y="0"/>
+          <a:ext cx="0" cy="0"/>
+          <a:chOff x="0" y="0"/>
+          <a:chExt cx="0" cy="0"/>
+        </a:xfrm>
+      </p:grpSpPr>
+      <p:pic>
+        <p:nvPicPr>
+          <p:cNvPr id="11" name="Picture 10">
+            <a:extLst>
+              <a:ext uri="{FF2B5EF4-FFF2-40B4-BE49-F238E27FC236}">
+                <a16:creationId xmlns:a16="http://schemas.microsoft.com/office/drawing/2014/main" id="{6745E9C9-03CA-E310-16E1-409601EFD320}"/>
+              </a:ext>
+            </a:extLst>
+          </p:cNvPr>
+          <p:cNvPicPr>
+            <a:picLocks noChangeAspect="1"/>
+          </p:cNvPicPr>
+          <p:nvPr/>
+        </p:nvPicPr>
+        <p:blipFill>
+          <a:blip r:embed="rId2"/>
+          <a:stretch>
+            <a:fillRect/>
+          </a:stretch>
+        </p:blipFill>
+        <p:spPr>
+          <a:xfrm>
+            <a:off x="5605026" y="2047875"/>
+            <a:ext cx="6342935" cy="4316158"/>
+          </a:xfrm>
+          <a:prstGeom prst="rect">
+            <a:avLst/>
+          </a:prstGeom>
+        </p:spPr>
+      </p:pic>
+      <p:sp>
+        <p:nvSpPr>
+          <p:cNvPr id="27" name="TextBox 26">
+            <a:extLst>
+              <a:ext uri="{FF2B5EF4-FFF2-40B4-BE49-F238E27FC236}">
+                <a16:creationId xmlns:a16="http://schemas.microsoft.com/office/drawing/2014/main" id="{431DE681-D52A-81B9-A07E-7AC52E16B5BB}"/>
+              </a:ext>
+            </a:extLst>
+          </p:cNvPr>
+          <p:cNvSpPr txBox="1"/>
+          <p:nvPr/>
+        </p:nvSpPr>
+        <p:spPr>
+          <a:xfrm>
+            <a:off x="326078" y="5473253"/>
+            <a:ext cx="4683718" cy="369332"/>
+          </a:xfrm>
+          <a:prstGeom prst="rect">
+            <a:avLst/>
+          </a:prstGeom>
+          <a:noFill/>
+        </p:spPr>
+        <p:txBody>
+          <a:bodyPr wrap="none" rtlCol="0">
+            <a:spAutoFit/>
+          </a:bodyPr>
+          <a:lstStyle/>
+          <a:p>
+            <a:r>
+              <a:rPr lang="en-GB" dirty="0"/>
+              <a:t>4 – </a:t>
+            </a:r>
+            <a:r>
+              <a:rPr lang="en-GB" dirty="0" err="1"/>
+              <a:t>Captura</a:t>
+            </a:r>
+            <a:r>
+              <a:rPr lang="en-GB" dirty="0"/>
+              <a:t> de </a:t>
+            </a:r>
+            <a:r>
+              <a:rPr lang="en-GB" dirty="0" err="1"/>
+              <a:t>evento</a:t>
+            </a:r>
+            <a:r>
+              <a:rPr lang="en-GB" dirty="0"/>
+              <a:t> e </a:t>
+            </a:r>
+            <a:r>
+              <a:rPr lang="en-GB" dirty="0" err="1"/>
+              <a:t>invocação</a:t>
+            </a:r>
+            <a:r>
+              <a:rPr lang="en-GB" dirty="0"/>
+              <a:t> do </a:t>
+            </a:r>
+            <a:r>
+              <a:rPr lang="en-GB" dirty="0" err="1"/>
+              <a:t>modelo</a:t>
+            </a:r>
+            <a:endParaRPr lang="en-GB" dirty="0"/>
+          </a:p>
+        </p:txBody>
+      </p:sp>
+      <p:pic>
+        <p:nvPicPr>
+          <p:cNvPr id="35" name="Picture 34">
+            <a:extLst>
+              <a:ext uri="{FF2B5EF4-FFF2-40B4-BE49-F238E27FC236}">
+                <a16:creationId xmlns:a16="http://schemas.microsoft.com/office/drawing/2014/main" id="{7EF50546-0C38-0B76-0D88-1A46949DC27C}"/>
+              </a:ext>
+            </a:extLst>
+          </p:cNvPr>
+          <p:cNvPicPr>
+            <a:picLocks noChangeAspect="1"/>
+          </p:cNvPicPr>
+          <p:nvPr/>
+        </p:nvPicPr>
+        <p:blipFill>
+          <a:blip r:embed="rId3"/>
+          <a:stretch>
+            <a:fillRect/>
+          </a:stretch>
+        </p:blipFill>
+        <p:spPr>
+          <a:xfrm>
+            <a:off x="1333500" y="2415364"/>
+            <a:ext cx="1965786" cy="2904575"/>
+          </a:xfrm>
+          <a:prstGeom prst="rect">
+            <a:avLst/>
+          </a:prstGeom>
+        </p:spPr>
+      </p:pic>
+      <p:sp>
+        <p:nvSpPr>
+          <p:cNvPr id="36" name="Rectangle 35">
+            <a:extLst>
+              <a:ext uri="{FF2B5EF4-FFF2-40B4-BE49-F238E27FC236}">
+                <a16:creationId xmlns:a16="http://schemas.microsoft.com/office/drawing/2014/main" id="{B5C8DD1B-D919-ECC9-D6E2-1FAE5777091F}"/>
+              </a:ext>
+            </a:extLst>
+          </p:cNvPr>
+          <p:cNvSpPr/>
+          <p:nvPr/>
+        </p:nvSpPr>
+        <p:spPr>
+          <a:xfrm>
+            <a:off x="1838324" y="3903747"/>
+            <a:ext cx="829613" cy="230104"/>
+          </a:xfrm>
+          <a:prstGeom prst="rect">
+            <a:avLst/>
+          </a:prstGeom>
+          <a:noFill/>
+          <a:ln>
+            <a:solidFill>
+              <a:srgbClr val="FF0000"/>
+            </a:solidFill>
+          </a:ln>
+        </p:spPr>
+        <p:style>
+          <a:lnRef idx="2">
+            <a:schemeClr val="accent1">
+              <a:shade val="15000"/>
+            </a:schemeClr>
+          </a:lnRef>
+          <a:fillRef idx="1">
+            <a:schemeClr val="accent1"/>
+          </a:fillRef>
+          <a:effectRef idx="0">
+            <a:schemeClr val="accent1"/>
+          </a:effectRef>
+          <a:fontRef idx="minor">
+            <a:schemeClr val="lt1"/>
+          </a:fontRef>
+        </p:style>
+        <p:txBody>
+          <a:bodyPr rtlCol="0" anchor="ctr"/>
+          <a:lstStyle/>
+          <a:p>
+            <a:pPr algn="ctr"/>
+            <a:endParaRPr lang="en-GB"/>
+          </a:p>
+        </p:txBody>
+      </p:sp>
+      <p:sp>
+        <p:nvSpPr>
+          <p:cNvPr id="37" name="Oval 36">
+            <a:extLst>
+              <a:ext uri="{FF2B5EF4-FFF2-40B4-BE49-F238E27FC236}">
+                <a16:creationId xmlns:a16="http://schemas.microsoft.com/office/drawing/2014/main" id="{26CBA6FF-0AF5-E532-3FA8-183DBB462196}"/>
+              </a:ext>
+            </a:extLst>
+          </p:cNvPr>
+          <p:cNvSpPr/>
+          <p:nvPr/>
+        </p:nvSpPr>
+        <p:spPr>
+          <a:xfrm>
+            <a:off x="2696512" y="3780207"/>
+            <a:ext cx="292608" cy="301752"/>
+          </a:xfrm>
+          <a:prstGeom prst="ellipse">
+            <a:avLst/>
+          </a:prstGeom>
+          <a:noFill/>
+          <a:ln>
+            <a:solidFill>
+              <a:srgbClr val="FF0000"/>
+            </a:solidFill>
+          </a:ln>
+        </p:spPr>
+        <p:style>
+          <a:lnRef idx="2">
+            <a:schemeClr val="accent1">
+              <a:shade val="15000"/>
+            </a:schemeClr>
+          </a:lnRef>
+          <a:fillRef idx="1">
+            <a:schemeClr val="accent1"/>
+          </a:fillRef>
+          <a:effectRef idx="0">
+            <a:schemeClr val="accent1"/>
+          </a:effectRef>
+          <a:fontRef idx="minor">
+            <a:schemeClr val="lt1"/>
+          </a:fontRef>
+        </p:style>
+        <p:txBody>
+          <a:bodyPr rtlCol="0" anchor="ctr"/>
+          <a:lstStyle/>
+          <a:p>
+            <a:pPr algn="ctr"/>
+            <a:r>
+              <a:rPr lang="en-GB" dirty="0">
+                <a:solidFill>
+                  <a:srgbClr val="FF0000"/>
+                </a:solidFill>
+              </a:rPr>
+              <a:t>4</a:t>
+            </a:r>
+          </a:p>
+        </p:txBody>
+      </p:sp>
+      <p:sp>
+        <p:nvSpPr>
+          <p:cNvPr id="2" name="Title 25">
+            <a:extLst>
+              <a:ext uri="{FF2B5EF4-FFF2-40B4-BE49-F238E27FC236}">
+                <a16:creationId xmlns:a16="http://schemas.microsoft.com/office/drawing/2014/main" id="{C5D6AFC8-C46B-3C4C-DDA9-3904F568BF65}"/>
+              </a:ext>
+            </a:extLst>
+          </p:cNvPr>
+          <p:cNvSpPr>
+            <a:spLocks noGrp="1"/>
+          </p:cNvSpPr>
+          <p:nvPr>
+            <p:ph type="title"/>
+          </p:nvPr>
+        </p:nvSpPr>
+        <p:spPr>
+          <a:xfrm>
+            <a:off x="838200" y="382189"/>
+            <a:ext cx="10515600" cy="1325563"/>
+          </a:xfrm>
+        </p:spPr>
+        <p:txBody>
+          <a:bodyPr/>
+          <a:lstStyle/>
+          <a:p>
+            <a:r>
+              <a:rPr lang="en-GB" b="1" dirty="0"/>
+              <a:t>Reinforcement Learning Android implementation</a:t>
+            </a:r>
+            <a:endParaRPr lang="en-GB" dirty="0"/>
+          </a:p>
+        </p:txBody>
+      </p:sp>
+    </p:spTree>
+    <p:extLst>
+      <p:ext uri="{BB962C8B-B14F-4D97-AF65-F5344CB8AC3E}">
+        <p14:creationId xmlns:p14="http://schemas.microsoft.com/office/powerpoint/2010/main" val="1100361024"/>
       </p:ext>
     </p:extLst>
   </p:cSld>
@@ -5784,40 +6689,10 @@
       </p:grpSpPr>
       <p:pic>
         <p:nvPicPr>
-          <p:cNvPr id="5" name="Picture 4">
-            <a:extLst>
-              <a:ext uri="{FF2B5EF4-FFF2-40B4-BE49-F238E27FC236}">
-                <a16:creationId xmlns:a16="http://schemas.microsoft.com/office/drawing/2014/main" id="{5B78EA9E-DD58-7642-B93D-2203964E02DD}"/>
-              </a:ext>
-            </a:extLst>
-          </p:cNvPr>
-          <p:cNvPicPr>
-            <a:picLocks noChangeAspect="1"/>
-          </p:cNvPicPr>
-          <p:nvPr/>
-        </p:nvPicPr>
-        <p:blipFill>
-          <a:blip r:embed="rId2"/>
-          <a:stretch>
-            <a:fillRect/>
-          </a:stretch>
-        </p:blipFill>
-        <p:spPr>
-          <a:xfrm>
-            <a:off x="327071" y="928302"/>
-            <a:ext cx="2972215" cy="4391638"/>
-          </a:xfrm>
-          <a:prstGeom prst="rect">
-            <a:avLst/>
-          </a:prstGeom>
-        </p:spPr>
-      </p:pic>
-      <p:pic>
-        <p:nvPicPr>
-          <p:cNvPr id="11" name="Picture 10">
-            <a:extLst>
-              <a:ext uri="{FF2B5EF4-FFF2-40B4-BE49-F238E27FC236}">
-                <a16:creationId xmlns:a16="http://schemas.microsoft.com/office/drawing/2014/main" id="{6745E9C9-03CA-E310-16E1-409601EFD320}"/>
+          <p:cNvPr id="23" name="Picture 22">
+            <a:extLst>
+              <a:ext uri="{FF2B5EF4-FFF2-40B4-BE49-F238E27FC236}">
+                <a16:creationId xmlns:a16="http://schemas.microsoft.com/office/drawing/2014/main" id="{A8392B9E-E86C-CDCD-D961-E1894F997F52}"/>
               </a:ext>
             </a:extLst>
           </p:cNvPr>
@@ -5834,84 +6709,20 @@
         </p:blipFill>
         <p:spPr>
           <a:xfrm>
-            <a:off x="4271967" y="832118"/>
-            <a:ext cx="6309879" cy="4293665"/>
+            <a:off x="6894109" y="3414257"/>
+            <a:ext cx="3793033" cy="3337869"/>
           </a:xfrm>
           <a:prstGeom prst="rect">
             <a:avLst/>
           </a:prstGeom>
         </p:spPr>
       </p:pic>
-      <p:sp>
-        <p:nvSpPr>
-          <p:cNvPr id="27" name="TextBox 26">
-            <a:extLst>
-              <a:ext uri="{FF2B5EF4-FFF2-40B4-BE49-F238E27FC236}">
-                <a16:creationId xmlns:a16="http://schemas.microsoft.com/office/drawing/2014/main" id="{431DE681-D52A-81B9-A07E-7AC52E16B5BB}"/>
-              </a:ext>
-            </a:extLst>
-          </p:cNvPr>
-          <p:cNvSpPr txBox="1"/>
-          <p:nvPr/>
-        </p:nvSpPr>
-        <p:spPr>
-          <a:xfrm>
-            <a:off x="326078" y="5473253"/>
-            <a:ext cx="4683718" cy="369332"/>
-          </a:xfrm>
-          <a:prstGeom prst="rect">
-            <a:avLst/>
-          </a:prstGeom>
-          <a:noFill/>
-        </p:spPr>
-        <p:txBody>
-          <a:bodyPr wrap="none" rtlCol="0">
-            <a:spAutoFit/>
-          </a:bodyPr>
-          <a:lstStyle/>
-          <a:p>
-            <a:r>
-              <a:rPr lang="en-GB" dirty="0"/>
-              <a:t>4 – </a:t>
-            </a:r>
-            <a:r>
-              <a:rPr lang="en-GB" dirty="0" err="1"/>
-              <a:t>Captura</a:t>
-            </a:r>
-            <a:r>
-              <a:rPr lang="en-GB" dirty="0"/>
-              <a:t> de </a:t>
-            </a:r>
-            <a:r>
-              <a:rPr lang="en-GB" dirty="0" err="1"/>
-              <a:t>evento</a:t>
-            </a:r>
-            <a:r>
-              <a:rPr lang="en-GB" dirty="0"/>
-              <a:t> e </a:t>
-            </a:r>
-            <a:r>
-              <a:rPr lang="en-GB" dirty="0" err="1"/>
-              <a:t>invocação</a:t>
-            </a:r>
-            <a:r>
-              <a:rPr lang="en-GB" dirty="0"/>
-              <a:t> do </a:t>
-            </a:r>
-            <a:r>
-              <a:rPr lang="en-GB" dirty="0" err="1"/>
-              <a:t>modelo</a:t>
-            </a:r>
-            <a:endParaRPr lang="en-GB" dirty="0"/>
-          </a:p>
-        </p:txBody>
-      </p:sp>
       <p:pic>
         <p:nvPicPr>
-          <p:cNvPr id="35" name="Picture 34">
-            <a:extLst>
-              <a:ext uri="{FF2B5EF4-FFF2-40B4-BE49-F238E27FC236}">
-                <a16:creationId xmlns:a16="http://schemas.microsoft.com/office/drawing/2014/main" id="{7EF50546-0C38-0B76-0D88-1A46949DC27C}"/>
+          <p:cNvPr id="6" name="Picture 5">
+            <a:extLst>
+              <a:ext uri="{FF2B5EF4-FFF2-40B4-BE49-F238E27FC236}">
+                <a16:creationId xmlns:a16="http://schemas.microsoft.com/office/drawing/2014/main" id="{6F98D77E-948C-FBFE-E937-74AE0A828FFA}"/>
               </a:ext>
             </a:extLst>
           </p:cNvPr>
@@ -5921,27 +6732,57 @@
           <p:nvPr/>
         </p:nvPicPr>
         <p:blipFill>
-          <a:blip r:embed="rId2"/>
+          <a:blip r:embed="rId4"/>
           <a:stretch>
             <a:fillRect/>
           </a:stretch>
         </p:blipFill>
         <p:spPr>
           <a:xfrm>
-            <a:off x="327071" y="928302"/>
-            <a:ext cx="2972215" cy="4391638"/>
+            <a:off x="6894109" y="1832890"/>
+            <a:ext cx="5220953" cy="1537869"/>
           </a:xfrm>
           <a:prstGeom prst="rect">
             <a:avLst/>
           </a:prstGeom>
         </p:spPr>
       </p:pic>
-      <p:sp>
-        <p:nvSpPr>
-          <p:cNvPr id="36" name="Rectangle 35">
-            <a:extLst>
-              <a:ext uri="{FF2B5EF4-FFF2-40B4-BE49-F238E27FC236}">
-                <a16:creationId xmlns:a16="http://schemas.microsoft.com/office/drawing/2014/main" id="{B5C8DD1B-D919-ECC9-D6E2-1FAE5777091F}"/>
+      <p:pic>
+        <p:nvPicPr>
+          <p:cNvPr id="7" name="Picture 6">
+            <a:extLst>
+              <a:ext uri="{FF2B5EF4-FFF2-40B4-BE49-F238E27FC236}">
+                <a16:creationId xmlns:a16="http://schemas.microsoft.com/office/drawing/2014/main" id="{2B666373-89B4-6644-115A-5CA1696DCFC8}"/>
+              </a:ext>
+            </a:extLst>
+          </p:cNvPr>
+          <p:cNvPicPr>
+            <a:picLocks noChangeAspect="1"/>
+          </p:cNvPicPr>
+          <p:nvPr/>
+        </p:nvPicPr>
+        <p:blipFill>
+          <a:blip r:embed="rId5"/>
+          <a:stretch>
+            <a:fillRect/>
+          </a:stretch>
+        </p:blipFill>
+        <p:spPr>
+          <a:xfrm>
+            <a:off x="6898005" y="148382"/>
+            <a:ext cx="5220953" cy="1633174"/>
+          </a:xfrm>
+          <a:prstGeom prst="rect">
+            <a:avLst/>
+          </a:prstGeom>
+        </p:spPr>
+      </p:pic>
+      <p:sp>
+        <p:nvSpPr>
+          <p:cNvPr id="10" name="Rectangle 9">
+            <a:extLst>
+              <a:ext uri="{FF2B5EF4-FFF2-40B4-BE49-F238E27FC236}">
+                <a16:creationId xmlns:a16="http://schemas.microsoft.com/office/drawing/2014/main" id="{8834F66B-8048-D2D0-1E5E-1C771D7DAA87}"/>
               </a:ext>
             </a:extLst>
           </p:cNvPr>
@@ -5950,8 +6791,8 @@
         </p:nvSpPr>
         <p:spPr>
           <a:xfrm>
-            <a:off x="925068" y="3196134"/>
-            <a:ext cx="2183718" cy="305637"/>
+            <a:off x="6898005" y="147804"/>
+            <a:ext cx="5217057" cy="1633174"/>
           </a:xfrm>
           <a:prstGeom prst="rect">
             <a:avLst/>
@@ -5990,10 +6831,10 @@
       </p:sp>
       <p:sp>
         <p:nvSpPr>
-          <p:cNvPr id="37" name="Oval 36">
-            <a:extLst>
-              <a:ext uri="{FF2B5EF4-FFF2-40B4-BE49-F238E27FC236}">
-                <a16:creationId xmlns:a16="http://schemas.microsoft.com/office/drawing/2014/main" id="{26CBA6FF-0AF5-E532-3FA8-183DBB462196}"/>
+          <p:cNvPr id="11" name="Oval 10">
+            <a:extLst>
+              <a:ext uri="{FF2B5EF4-FFF2-40B4-BE49-F238E27FC236}">
+                <a16:creationId xmlns:a16="http://schemas.microsoft.com/office/drawing/2014/main" id="{7E9AE7A9-2A4E-6CB4-3D80-955BC1B80474}"/>
               </a:ext>
             </a:extLst>
           </p:cNvPr>
@@ -6002,7 +6843,7 @@
         </p:nvSpPr>
         <p:spPr>
           <a:xfrm>
-            <a:off x="2667937" y="2894382"/>
+            <a:off x="11051851" y="2659888"/>
             <a:ext cx="292608" cy="301752"/>
           </a:xfrm>
           <a:prstGeom prst="ellipse">
@@ -6042,198 +6883,26 @@
                   <a:srgbClr val="FF0000"/>
                 </a:solidFill>
               </a:rPr>
-              <a:t>4</a:t>
-            </a:r>
-          </a:p>
-        </p:txBody>
-      </p:sp>
-    </p:spTree>
-    <p:extLst>
-      <p:ext uri="{BB962C8B-B14F-4D97-AF65-F5344CB8AC3E}">
-        <p14:creationId xmlns:p14="http://schemas.microsoft.com/office/powerpoint/2010/main" val="1100361024"/>
-      </p:ext>
-    </p:extLst>
-  </p:cSld>
-  <p:clrMapOvr>
-    <a:masterClrMapping/>
-  </p:clrMapOvr>
-</p:sld>
-</file>
-
-<file path=ppt/slides/slide16.xml><?xml version="1.0" encoding="utf-8"?>
-<p:sld xmlns:a="http://schemas.openxmlformats.org/drawingml/2006/main" xmlns:r="http://schemas.openxmlformats.org/officeDocument/2006/relationships" xmlns:p="http://schemas.openxmlformats.org/presentationml/2006/main">
-  <p:cSld>
-    <p:spTree>
-      <p:nvGrpSpPr>
-        <p:cNvPr id="1" name=""/>
-        <p:cNvGrpSpPr/>
-        <p:nvPr/>
-      </p:nvGrpSpPr>
-      <p:grpSpPr>
-        <a:xfrm>
-          <a:off x="0" y="0"/>
-          <a:ext cx="0" cy="0"/>
-          <a:chOff x="0" y="0"/>
-          <a:chExt cx="0" cy="0"/>
-        </a:xfrm>
-      </p:grpSpPr>
-      <p:pic>
-        <p:nvPicPr>
-          <p:cNvPr id="23" name="Picture 22">
-            <a:extLst>
-              <a:ext uri="{FF2B5EF4-FFF2-40B4-BE49-F238E27FC236}">
-                <a16:creationId xmlns:a16="http://schemas.microsoft.com/office/drawing/2014/main" id="{A8392B9E-E86C-CDCD-D961-E1894F997F52}"/>
-              </a:ext>
-            </a:extLst>
-          </p:cNvPr>
-          <p:cNvPicPr>
-            <a:picLocks noChangeAspect="1"/>
-          </p:cNvPicPr>
+              <a:t>5</a:t>
+            </a:r>
+          </a:p>
+        </p:txBody>
+      </p:sp>
+      <p:sp>
+        <p:nvSpPr>
+          <p:cNvPr id="12" name="Oval 11">
+            <a:extLst>
+              <a:ext uri="{FF2B5EF4-FFF2-40B4-BE49-F238E27FC236}">
+                <a16:creationId xmlns:a16="http://schemas.microsoft.com/office/drawing/2014/main" id="{37A48C86-2165-9E4D-EE38-20AC1FC57447}"/>
+              </a:ext>
+            </a:extLst>
+          </p:cNvPr>
+          <p:cNvSpPr/>
           <p:nvPr/>
-        </p:nvPicPr>
-        <p:blipFill>
-          <a:blip r:embed="rId2"/>
-          <a:stretch>
-            <a:fillRect/>
-          </a:stretch>
-        </p:blipFill>
+        </p:nvSpPr>
         <p:spPr>
           <a:xfrm>
-            <a:off x="6482629" y="3423401"/>
-            <a:ext cx="3793033" cy="3337869"/>
-          </a:xfrm>
-          <a:prstGeom prst="rect">
-            <a:avLst/>
-          </a:prstGeom>
-        </p:spPr>
-      </p:pic>
-      <p:pic>
-        <p:nvPicPr>
-          <p:cNvPr id="6" name="Picture 5">
-            <a:extLst>
-              <a:ext uri="{FF2B5EF4-FFF2-40B4-BE49-F238E27FC236}">
-                <a16:creationId xmlns:a16="http://schemas.microsoft.com/office/drawing/2014/main" id="{6F98D77E-948C-FBFE-E937-74AE0A828FFA}"/>
-              </a:ext>
-            </a:extLst>
-          </p:cNvPr>
-          <p:cNvPicPr>
-            <a:picLocks noChangeAspect="1"/>
-          </p:cNvPicPr>
-          <p:nvPr/>
-        </p:nvPicPr>
-        <p:blipFill>
-          <a:blip r:embed="rId3"/>
-          <a:stretch>
-            <a:fillRect/>
-          </a:stretch>
-        </p:blipFill>
-        <p:spPr>
-          <a:xfrm>
-            <a:off x="6482629" y="1842034"/>
-            <a:ext cx="5220953" cy="1537869"/>
-          </a:xfrm>
-          <a:prstGeom prst="rect">
-            <a:avLst/>
-          </a:prstGeom>
-        </p:spPr>
-      </p:pic>
-      <p:pic>
-        <p:nvPicPr>
-          <p:cNvPr id="7" name="Picture 6">
-            <a:extLst>
-              <a:ext uri="{FF2B5EF4-FFF2-40B4-BE49-F238E27FC236}">
-                <a16:creationId xmlns:a16="http://schemas.microsoft.com/office/drawing/2014/main" id="{2B666373-89B4-6644-115A-5CA1696DCFC8}"/>
-              </a:ext>
-            </a:extLst>
-          </p:cNvPr>
-          <p:cNvPicPr>
-            <a:picLocks noChangeAspect="1"/>
-          </p:cNvPicPr>
-          <p:nvPr/>
-        </p:nvPicPr>
-        <p:blipFill>
-          <a:blip r:embed="rId4"/>
-          <a:stretch>
-            <a:fillRect/>
-          </a:stretch>
-        </p:blipFill>
-        <p:spPr>
-          <a:xfrm>
-            <a:off x="6486525" y="157526"/>
-            <a:ext cx="5220953" cy="1633174"/>
-          </a:xfrm>
-          <a:prstGeom prst="rect">
-            <a:avLst/>
-          </a:prstGeom>
-        </p:spPr>
-      </p:pic>
-      <p:sp>
-        <p:nvSpPr>
-          <p:cNvPr id="10" name="Rectangle 9">
-            <a:extLst>
-              <a:ext uri="{FF2B5EF4-FFF2-40B4-BE49-F238E27FC236}">
-                <a16:creationId xmlns:a16="http://schemas.microsoft.com/office/drawing/2014/main" id="{8834F66B-8048-D2D0-1E5E-1C771D7DAA87}"/>
-              </a:ext>
-            </a:extLst>
-          </p:cNvPr>
-          <p:cNvSpPr/>
-          <p:nvPr/>
-        </p:nvSpPr>
-        <p:spPr>
-          <a:xfrm>
-            <a:off x="6486525" y="156948"/>
-            <a:ext cx="5217057" cy="1633174"/>
-          </a:xfrm>
-          <a:prstGeom prst="rect">
-            <a:avLst/>
-          </a:prstGeom>
-          <a:noFill/>
-          <a:ln>
-            <a:solidFill>
-              <a:srgbClr val="FF0000"/>
-            </a:solidFill>
-          </a:ln>
-        </p:spPr>
-        <p:style>
-          <a:lnRef idx="2">
-            <a:schemeClr val="accent1">
-              <a:shade val="15000"/>
-            </a:schemeClr>
-          </a:lnRef>
-          <a:fillRef idx="1">
-            <a:schemeClr val="accent1"/>
-          </a:fillRef>
-          <a:effectRef idx="0">
-            <a:schemeClr val="accent1"/>
-          </a:effectRef>
-          <a:fontRef idx="minor">
-            <a:schemeClr val="lt1"/>
-          </a:fontRef>
-        </p:style>
-        <p:txBody>
-          <a:bodyPr rtlCol="0" anchor="ctr"/>
-          <a:lstStyle/>
-          <a:p>
-            <a:pPr algn="ctr"/>
-            <a:endParaRPr lang="en-GB"/>
-          </a:p>
-        </p:txBody>
-      </p:sp>
-      <p:sp>
-        <p:nvSpPr>
-          <p:cNvPr id="11" name="Oval 10">
-            <a:extLst>
-              <a:ext uri="{FF2B5EF4-FFF2-40B4-BE49-F238E27FC236}">
-                <a16:creationId xmlns:a16="http://schemas.microsoft.com/office/drawing/2014/main" id="{7E9AE7A9-2A4E-6CB4-3D80-955BC1B80474}"/>
-              </a:ext>
-            </a:extLst>
-          </p:cNvPr>
-          <p:cNvSpPr/>
-          <p:nvPr/>
-        </p:nvSpPr>
-        <p:spPr>
-          <a:xfrm>
-            <a:off x="10640371" y="2669032"/>
+            <a:off x="11051851" y="1333784"/>
             <a:ext cx="292608" cy="301752"/>
           </a:xfrm>
           <a:prstGeom prst="ellipse">
@@ -6273,17 +6942,17 @@
                   <a:srgbClr val="FF0000"/>
                 </a:solidFill>
               </a:rPr>
-              <a:t>5</a:t>
-            </a:r>
-          </a:p>
-        </p:txBody>
-      </p:sp>
-      <p:sp>
-        <p:nvSpPr>
-          <p:cNvPr id="12" name="Oval 11">
-            <a:extLst>
-              <a:ext uri="{FF2B5EF4-FFF2-40B4-BE49-F238E27FC236}">
-                <a16:creationId xmlns:a16="http://schemas.microsoft.com/office/drawing/2014/main" id="{37A48C86-2165-9E4D-EE38-20AC1FC57447}"/>
+              <a:t>3</a:t>
+            </a:r>
+          </a:p>
+        </p:txBody>
+      </p:sp>
+      <p:sp>
+        <p:nvSpPr>
+          <p:cNvPr id="14" name="Rectangle 13">
+            <a:extLst>
+              <a:ext uri="{FF2B5EF4-FFF2-40B4-BE49-F238E27FC236}">
+                <a16:creationId xmlns:a16="http://schemas.microsoft.com/office/drawing/2014/main" id="{A6466694-F420-A187-A6B5-6C0568AE27F4}"/>
               </a:ext>
             </a:extLst>
           </p:cNvPr>
@@ -6292,7 +6961,111 @@
         </p:nvSpPr>
         <p:spPr>
           <a:xfrm>
-            <a:off x="10640371" y="1342928"/>
+            <a:off x="6898005" y="1842415"/>
+            <a:ext cx="5217056" cy="1522976"/>
+          </a:xfrm>
+          <a:prstGeom prst="rect">
+            <a:avLst/>
+          </a:prstGeom>
+          <a:noFill/>
+          <a:ln>
+            <a:solidFill>
+              <a:srgbClr val="FF0000"/>
+            </a:solidFill>
+          </a:ln>
+        </p:spPr>
+        <p:style>
+          <a:lnRef idx="2">
+            <a:schemeClr val="accent1">
+              <a:shade val="15000"/>
+            </a:schemeClr>
+          </a:lnRef>
+          <a:fillRef idx="1">
+            <a:schemeClr val="accent1"/>
+          </a:fillRef>
+          <a:effectRef idx="0">
+            <a:schemeClr val="accent1"/>
+          </a:effectRef>
+          <a:fontRef idx="minor">
+            <a:schemeClr val="lt1"/>
+          </a:fontRef>
+        </p:style>
+        <p:txBody>
+          <a:bodyPr rtlCol="0" anchor="ctr"/>
+          <a:lstStyle/>
+          <a:p>
+            <a:pPr algn="ctr"/>
+            <a:endParaRPr lang="en-GB"/>
+          </a:p>
+        </p:txBody>
+      </p:sp>
+      <p:sp>
+        <p:nvSpPr>
+          <p:cNvPr id="15" name="Rectangle 14">
+            <a:extLst>
+              <a:ext uri="{FF2B5EF4-FFF2-40B4-BE49-F238E27FC236}">
+                <a16:creationId xmlns:a16="http://schemas.microsoft.com/office/drawing/2014/main" id="{7A18198F-3DE1-94F3-0203-9AFC750DE12D}"/>
+              </a:ext>
+            </a:extLst>
+          </p:cNvPr>
+          <p:cNvSpPr/>
+          <p:nvPr/>
+        </p:nvSpPr>
+        <p:spPr>
+          <a:xfrm>
+            <a:off x="6898005" y="3425455"/>
+            <a:ext cx="3789137" cy="3337868"/>
+          </a:xfrm>
+          <a:prstGeom prst="rect">
+            <a:avLst/>
+          </a:prstGeom>
+          <a:noFill/>
+          <a:ln>
+            <a:solidFill>
+              <a:srgbClr val="FF0000"/>
+            </a:solidFill>
+          </a:ln>
+        </p:spPr>
+        <p:style>
+          <a:lnRef idx="2">
+            <a:schemeClr val="accent1">
+              <a:shade val="15000"/>
+            </a:schemeClr>
+          </a:lnRef>
+          <a:fillRef idx="1">
+            <a:schemeClr val="accent1"/>
+          </a:fillRef>
+          <a:effectRef idx="0">
+            <a:schemeClr val="accent1"/>
+          </a:effectRef>
+          <a:fontRef idx="minor">
+            <a:schemeClr val="lt1"/>
+          </a:fontRef>
+        </p:style>
+        <p:txBody>
+          <a:bodyPr rtlCol="0" anchor="ctr"/>
+          <a:lstStyle/>
+          <a:p>
+            <a:pPr algn="ctr"/>
+            <a:endParaRPr lang="en-GB"/>
+          </a:p>
+        </p:txBody>
+      </p:sp>
+      <p:sp>
+        <p:nvSpPr>
+          <p:cNvPr id="16" name="Oval 15">
+            <a:extLst>
+              <a:ext uri="{FF2B5EF4-FFF2-40B4-BE49-F238E27FC236}">
+                <a16:creationId xmlns:a16="http://schemas.microsoft.com/office/drawing/2014/main" id="{4BB18DD5-01BB-0948-5389-DB88FC00474C}"/>
+              </a:ext>
+            </a:extLst>
+          </p:cNvPr>
+          <p:cNvSpPr/>
+          <p:nvPr/>
+        </p:nvSpPr>
+        <p:spPr>
+          <a:xfrm>
+            <a:off x="10127926" y="3575272"/>
             <a:ext cx="292608" cy="301752"/>
           </a:xfrm>
           <a:prstGeom prst="ellipse">
@@ -6332,121 +7105,125 @@
                   <a:srgbClr val="FF0000"/>
                 </a:solidFill>
               </a:rPr>
-              <a:t>3</a:t>
-            </a:r>
-          </a:p>
-        </p:txBody>
-      </p:sp>
-      <p:sp>
-        <p:nvSpPr>
-          <p:cNvPr id="14" name="Rectangle 13">
-            <a:extLst>
-              <a:ext uri="{FF2B5EF4-FFF2-40B4-BE49-F238E27FC236}">
-                <a16:creationId xmlns:a16="http://schemas.microsoft.com/office/drawing/2014/main" id="{A6466694-F420-A187-A6B5-6C0568AE27F4}"/>
-              </a:ext>
-            </a:extLst>
-          </p:cNvPr>
-          <p:cNvSpPr/>
+              <a:t>6</a:t>
+            </a:r>
+          </a:p>
+        </p:txBody>
+      </p:sp>
+      <p:sp>
+        <p:nvSpPr>
+          <p:cNvPr id="17" name="TextBox 16">
+            <a:extLst>
+              <a:ext uri="{FF2B5EF4-FFF2-40B4-BE49-F238E27FC236}">
+                <a16:creationId xmlns:a16="http://schemas.microsoft.com/office/drawing/2014/main" id="{802E2AF8-98FE-AAB0-6515-6243E2A7EE0D}"/>
+              </a:ext>
+            </a:extLst>
+          </p:cNvPr>
+          <p:cNvSpPr txBox="1"/>
           <p:nvPr/>
         </p:nvSpPr>
         <p:spPr>
           <a:xfrm>
-            <a:off x="6486525" y="1851559"/>
-            <a:ext cx="5217056" cy="1522976"/>
+            <a:off x="221303" y="5702412"/>
+            <a:ext cx="4374596" cy="923330"/>
           </a:xfrm>
           <a:prstGeom prst="rect">
             <a:avLst/>
           </a:prstGeom>
           <a:noFill/>
-          <a:ln>
-            <a:solidFill>
-              <a:srgbClr val="FF0000"/>
-            </a:solidFill>
-          </a:ln>
         </p:spPr>
-        <p:style>
-          <a:lnRef idx="2">
-            <a:schemeClr val="accent1">
-              <a:shade val="15000"/>
-            </a:schemeClr>
-          </a:lnRef>
-          <a:fillRef idx="1">
-            <a:schemeClr val="accent1"/>
-          </a:fillRef>
-          <a:effectRef idx="0">
-            <a:schemeClr val="accent1"/>
-          </a:effectRef>
-          <a:fontRef idx="minor">
-            <a:schemeClr val="lt1"/>
-          </a:fontRef>
-        </p:style>
-        <p:txBody>
-          <a:bodyPr rtlCol="0" anchor="ctr"/>
-          <a:lstStyle/>
-          <a:p>
-            <a:pPr algn="ctr"/>
-            <a:endParaRPr lang="en-GB"/>
-          </a:p>
-        </p:txBody>
-      </p:sp>
-      <p:sp>
-        <p:nvSpPr>
-          <p:cNvPr id="15" name="Rectangle 14">
-            <a:extLst>
-              <a:ext uri="{FF2B5EF4-FFF2-40B4-BE49-F238E27FC236}">
-                <a16:creationId xmlns:a16="http://schemas.microsoft.com/office/drawing/2014/main" id="{7A18198F-3DE1-94F3-0203-9AFC750DE12D}"/>
-              </a:ext>
-            </a:extLst>
-          </p:cNvPr>
-          <p:cNvSpPr/>
+        <p:txBody>
+          <a:bodyPr wrap="square" rtlCol="0">
+            <a:spAutoFit/>
+          </a:bodyPr>
+          <a:lstStyle/>
+          <a:p>
+            <a:r>
+              <a:rPr lang="en-GB" dirty="0"/>
+              <a:t>3 – </a:t>
+            </a:r>
+            <a:r>
+              <a:rPr lang="en-GB" dirty="0" err="1"/>
+              <a:t>Invocação</a:t>
+            </a:r>
+            <a:r>
+              <a:rPr lang="en-GB" dirty="0"/>
+              <a:t> do </a:t>
+            </a:r>
+            <a:r>
+              <a:rPr lang="en-GB" dirty="0" err="1"/>
+              <a:t>modelo</a:t>
+            </a:r>
+            <a:endParaRPr lang="en-GB" dirty="0"/>
+          </a:p>
+          <a:p>
+            <a:r>
+              <a:rPr lang="en-GB" dirty="0"/>
+              <a:t>5 – </a:t>
+            </a:r>
+            <a:r>
+              <a:rPr lang="en-GB" dirty="0" err="1"/>
+              <a:t>Resultado</a:t>
+            </a:r>
+            <a:r>
+              <a:rPr lang="en-GB" dirty="0"/>
+              <a:t> da </a:t>
+            </a:r>
+            <a:r>
+              <a:rPr lang="en-GB" dirty="0" err="1"/>
+              <a:t>Inferência</a:t>
+            </a:r>
+            <a:endParaRPr lang="en-GB" dirty="0"/>
+          </a:p>
+          <a:p>
+            <a:r>
+              <a:rPr lang="en-GB" dirty="0"/>
+              <a:t>6 – Dados a </a:t>
+            </a:r>
+            <a:r>
+              <a:rPr lang="en-GB" dirty="0" err="1"/>
+              <a:t>apresentar</a:t>
+            </a:r>
+            <a:endParaRPr lang="en-GB" dirty="0"/>
+          </a:p>
+        </p:txBody>
+      </p:sp>
+      <p:pic>
+        <p:nvPicPr>
+          <p:cNvPr id="25" name="Picture 24">
+            <a:extLst>
+              <a:ext uri="{FF2B5EF4-FFF2-40B4-BE49-F238E27FC236}">
+                <a16:creationId xmlns:a16="http://schemas.microsoft.com/office/drawing/2014/main" id="{8FFD71B5-FD54-6A04-0D0B-33D0658E593A}"/>
+              </a:ext>
+            </a:extLst>
+          </p:cNvPr>
+          <p:cNvPicPr>
+            <a:picLocks noChangeAspect="1"/>
+          </p:cNvPicPr>
           <p:nvPr/>
-        </p:nvSpPr>
+        </p:nvPicPr>
+        <p:blipFill>
+          <a:blip r:embed="rId6"/>
+          <a:stretch>
+            <a:fillRect/>
+          </a:stretch>
+        </p:blipFill>
         <p:spPr>
           <a:xfrm>
-            <a:off x="6486525" y="3434599"/>
-            <a:ext cx="3789137" cy="3337868"/>
+            <a:off x="3182295" y="2324418"/>
+            <a:ext cx="1907396" cy="4151393"/>
           </a:xfrm>
           <a:prstGeom prst="rect">
             <a:avLst/>
           </a:prstGeom>
-          <a:noFill/>
-          <a:ln>
-            <a:solidFill>
-              <a:srgbClr val="FF0000"/>
-            </a:solidFill>
-          </a:ln>
         </p:spPr>
-        <p:style>
-          <a:lnRef idx="2">
-            <a:schemeClr val="accent1">
-              <a:shade val="15000"/>
-            </a:schemeClr>
-          </a:lnRef>
-          <a:fillRef idx="1">
-            <a:schemeClr val="accent1"/>
-          </a:fillRef>
-          <a:effectRef idx="0">
-            <a:schemeClr val="accent1"/>
-          </a:effectRef>
-          <a:fontRef idx="minor">
-            <a:schemeClr val="lt1"/>
-          </a:fontRef>
-        </p:style>
-        <p:txBody>
-          <a:bodyPr rtlCol="0" anchor="ctr"/>
-          <a:lstStyle/>
-          <a:p>
-            <a:pPr algn="ctr"/>
-            <a:endParaRPr lang="en-GB"/>
-          </a:p>
-        </p:txBody>
-      </p:sp>
-      <p:sp>
-        <p:nvSpPr>
-          <p:cNvPr id="16" name="Oval 15">
-            <a:extLst>
-              <a:ext uri="{FF2B5EF4-FFF2-40B4-BE49-F238E27FC236}">
-                <a16:creationId xmlns:a16="http://schemas.microsoft.com/office/drawing/2014/main" id="{4BB18DD5-01BB-0948-5389-DB88FC00474C}"/>
+      </p:pic>
+      <p:sp>
+        <p:nvSpPr>
+          <p:cNvPr id="18" name="Oval 17">
+            <a:extLst>
+              <a:ext uri="{FF2B5EF4-FFF2-40B4-BE49-F238E27FC236}">
+                <a16:creationId xmlns:a16="http://schemas.microsoft.com/office/drawing/2014/main" id="{F758AFB8-8A8F-5DAA-9F43-E3ED2B3E7652}"/>
               </a:ext>
             </a:extLst>
           </p:cNvPr>
@@ -6455,7 +7232,7 @@
         </p:nvSpPr>
         <p:spPr>
           <a:xfrm>
-            <a:off x="9716446" y="3584416"/>
+            <a:off x="4723198" y="3868422"/>
             <a:ext cx="292608" cy="301752"/>
           </a:xfrm>
           <a:prstGeom prst="ellipse">
@@ -6500,90 +7277,12 @@
           </a:p>
         </p:txBody>
       </p:sp>
-      <p:sp>
-        <p:nvSpPr>
-          <p:cNvPr id="17" name="TextBox 16">
-            <a:extLst>
-              <a:ext uri="{FF2B5EF4-FFF2-40B4-BE49-F238E27FC236}">
-                <a16:creationId xmlns:a16="http://schemas.microsoft.com/office/drawing/2014/main" id="{802E2AF8-98FE-AAB0-6515-6243E2A7EE0D}"/>
-              </a:ext>
-            </a:extLst>
-          </p:cNvPr>
-          <p:cNvSpPr txBox="1"/>
-          <p:nvPr/>
-        </p:nvSpPr>
-        <p:spPr>
-          <a:xfrm>
-            <a:off x="221303" y="5702412"/>
-            <a:ext cx="4374596" cy="923330"/>
-          </a:xfrm>
-          <a:prstGeom prst="rect">
-            <a:avLst/>
-          </a:prstGeom>
-          <a:noFill/>
-        </p:spPr>
-        <p:txBody>
-          <a:bodyPr wrap="square" rtlCol="0">
-            <a:spAutoFit/>
-          </a:bodyPr>
-          <a:lstStyle/>
-          <a:p>
-            <a:r>
-              <a:rPr lang="en-GB" dirty="0"/>
-              <a:t>3 – </a:t>
-            </a:r>
-            <a:r>
-              <a:rPr lang="en-GB" dirty="0" err="1"/>
-              <a:t>Invocação</a:t>
-            </a:r>
-            <a:r>
-              <a:rPr lang="en-GB" dirty="0"/>
-              <a:t> do </a:t>
-            </a:r>
-            <a:r>
-              <a:rPr lang="en-GB" dirty="0" err="1"/>
-              <a:t>modelo</a:t>
-            </a:r>
-            <a:endParaRPr lang="en-GB" dirty="0"/>
-          </a:p>
-          <a:p>
-            <a:r>
-              <a:rPr lang="en-GB" dirty="0"/>
-              <a:t>5 – </a:t>
-            </a:r>
-            <a:r>
-              <a:rPr lang="en-GB" dirty="0" err="1"/>
-              <a:t>Resultado</a:t>
-            </a:r>
-            <a:r>
-              <a:rPr lang="en-GB" dirty="0"/>
-              <a:t> da </a:t>
-            </a:r>
-            <a:r>
-              <a:rPr lang="en-GB" dirty="0" err="1"/>
-              <a:t>Inferência</a:t>
-            </a:r>
-            <a:endParaRPr lang="en-GB" dirty="0"/>
-          </a:p>
-          <a:p>
-            <a:r>
-              <a:rPr lang="en-GB" dirty="0"/>
-              <a:t>6 – Dados a </a:t>
-            </a:r>
-            <a:r>
-              <a:rPr lang="en-GB" dirty="0" err="1"/>
-              <a:t>apresentar</a:t>
-            </a:r>
-            <a:endParaRPr lang="en-GB" dirty="0"/>
-          </a:p>
-        </p:txBody>
-      </p:sp>
       <p:pic>
         <p:nvPicPr>
-          <p:cNvPr id="25" name="Picture 24">
-            <a:extLst>
-              <a:ext uri="{FF2B5EF4-FFF2-40B4-BE49-F238E27FC236}">
-                <a16:creationId xmlns:a16="http://schemas.microsoft.com/office/drawing/2014/main" id="{8FFD71B5-FD54-6A04-0D0B-33D0658E593A}"/>
+          <p:cNvPr id="27" name="Picture 26">
+            <a:extLst>
+              <a:ext uri="{FF2B5EF4-FFF2-40B4-BE49-F238E27FC236}">
+                <a16:creationId xmlns:a16="http://schemas.microsoft.com/office/drawing/2014/main" id="{5EB7F7F1-0DF6-2616-7035-18D6EECDDB81}"/>
               </a:ext>
             </a:extLst>
           </p:cNvPr>
@@ -6593,15 +7292,15 @@
           <p:nvPr/>
         </p:nvPicPr>
         <p:blipFill>
-          <a:blip r:embed="rId5"/>
+          <a:blip r:embed="rId7"/>
           <a:stretch>
             <a:fillRect/>
           </a:stretch>
         </p:blipFill>
         <p:spPr>
           <a:xfrm>
-            <a:off x="3712749" y="869763"/>
-            <a:ext cx="2503272" cy="5448300"/>
+            <a:off x="164480" y="2528841"/>
+            <a:ext cx="2714653" cy="2714653"/>
           </a:xfrm>
           <a:prstGeom prst="rect">
             <a:avLst/>
@@ -6610,10 +7309,10 @@
       </p:pic>
       <p:sp>
         <p:nvSpPr>
-          <p:cNvPr id="18" name="Oval 17">
-            <a:extLst>
-              <a:ext uri="{FF2B5EF4-FFF2-40B4-BE49-F238E27FC236}">
-                <a16:creationId xmlns:a16="http://schemas.microsoft.com/office/drawing/2014/main" id="{F758AFB8-8A8F-5DAA-9F43-E3ED2B3E7652}"/>
+          <p:cNvPr id="19" name="Oval 18">
+            <a:extLst>
+              <a:ext uri="{FF2B5EF4-FFF2-40B4-BE49-F238E27FC236}">
+                <a16:creationId xmlns:a16="http://schemas.microsoft.com/office/drawing/2014/main" id="{2831C308-14F6-912F-992D-842BA8259FB5}"/>
               </a:ext>
             </a:extLst>
           </p:cNvPr>
@@ -6622,7 +7321,7 @@
         </p:nvSpPr>
         <p:spPr>
           <a:xfrm>
-            <a:off x="5777110" y="2877855"/>
+            <a:off x="2476776" y="4819125"/>
             <a:ext cx="292608" cy="301752"/>
           </a:xfrm>
           <a:prstGeom prst="ellipse">
@@ -6667,92 +7366,44 @@
           </a:p>
         </p:txBody>
       </p:sp>
-      <p:pic>
-        <p:nvPicPr>
-          <p:cNvPr id="27" name="Picture 26">
-            <a:extLst>
-              <a:ext uri="{FF2B5EF4-FFF2-40B4-BE49-F238E27FC236}">
-                <a16:creationId xmlns:a16="http://schemas.microsoft.com/office/drawing/2014/main" id="{5EB7F7F1-0DF6-2616-7035-18D6EECDDB81}"/>
-              </a:ext>
-            </a:extLst>
-          </p:cNvPr>
-          <p:cNvPicPr>
-            <a:picLocks noChangeAspect="1"/>
-          </p:cNvPicPr>
-          <p:nvPr/>
-        </p:nvPicPr>
-        <p:blipFill>
-          <a:blip r:embed="rId6"/>
-          <a:stretch>
-            <a:fillRect/>
-          </a:stretch>
-        </p:blipFill>
+      <p:sp>
+        <p:nvSpPr>
+          <p:cNvPr id="2" name="Title 25">
+            <a:extLst>
+              <a:ext uri="{FF2B5EF4-FFF2-40B4-BE49-F238E27FC236}">
+                <a16:creationId xmlns:a16="http://schemas.microsoft.com/office/drawing/2014/main" id="{6CB733E0-FBC7-6C1E-5555-3D7947AFA91C}"/>
+              </a:ext>
+            </a:extLst>
+          </p:cNvPr>
+          <p:cNvSpPr>
+            <a:spLocks noGrp="1"/>
+          </p:cNvSpPr>
+          <p:nvPr>
+            <p:ph type="title"/>
+          </p:nvPr>
+        </p:nvSpPr>
         <p:spPr>
           <a:xfrm>
-            <a:off x="228920" y="869763"/>
-            <a:ext cx="3374836" cy="3374836"/>
+            <a:off x="838200" y="382189"/>
+            <a:ext cx="10515600" cy="1325563"/>
           </a:xfrm>
-          <a:prstGeom prst="rect">
-            <a:avLst/>
-          </a:prstGeom>
         </p:spPr>
-      </p:pic>
-      <p:sp>
-        <p:nvSpPr>
-          <p:cNvPr id="19" name="Oval 18">
-            <a:extLst>
-              <a:ext uri="{FF2B5EF4-FFF2-40B4-BE49-F238E27FC236}">
-                <a16:creationId xmlns:a16="http://schemas.microsoft.com/office/drawing/2014/main" id="{2831C308-14F6-912F-992D-842BA8259FB5}"/>
-              </a:ext>
-            </a:extLst>
-          </p:cNvPr>
-          <p:cNvSpPr/>
-          <p:nvPr/>
-        </p:nvSpPr>
-        <p:spPr>
-          <a:xfrm>
-            <a:off x="3149637" y="3805142"/>
-            <a:ext cx="292608" cy="301752"/>
-          </a:xfrm>
-          <a:prstGeom prst="ellipse">
-            <a:avLst/>
-          </a:prstGeom>
-          <a:noFill/>
-          <a:ln>
-            <a:solidFill>
-              <a:srgbClr val="FF0000"/>
-            </a:solidFill>
-          </a:ln>
-        </p:spPr>
-        <p:style>
-          <a:lnRef idx="2">
-            <a:schemeClr val="accent1">
-              <a:shade val="15000"/>
-            </a:schemeClr>
-          </a:lnRef>
-          <a:fillRef idx="1">
-            <a:schemeClr val="accent1"/>
-          </a:fillRef>
-          <a:effectRef idx="0">
-            <a:schemeClr val="accent1"/>
-          </a:effectRef>
-          <a:fontRef idx="minor">
-            <a:schemeClr val="lt1"/>
-          </a:fontRef>
-        </p:style>
-        <p:txBody>
-          <a:bodyPr rtlCol="0" anchor="ctr"/>
-          <a:lstStyle/>
-          <a:p>
-            <a:pPr algn="ctr"/>
-            <a:r>
-              <a:rPr lang="en-GB" dirty="0">
-                <a:solidFill>
-                  <a:srgbClr val="FF0000"/>
-                </a:solidFill>
-              </a:rPr>
-              <a:t>6</a:t>
-            </a:r>
+        <p:txBody>
+          <a:bodyPr/>
+          <a:lstStyle/>
+          <a:p>
+            <a:r>
+              <a:rPr lang="en-GB" b="1" dirty="0"/>
+              <a:t>Reinforcement Learning </a:t>
+            </a:r>
+            <a:br>
+              <a:rPr lang="en-GB" b="1" dirty="0"/>
+            </a:br>
+            <a:r>
+              <a:rPr lang="en-GB" b="1" dirty="0"/>
+              <a:t>Android visualization</a:t>
+            </a:r>
+            <a:endParaRPr lang="en-GB" dirty="0"/>
           </a:p>
         </p:txBody>
       </p:sp>
@@ -7301,6 +7952,10 @@
           <a:bodyPr/>
           <a:lstStyle/>
           <a:p>
+            <a:r>
+              <a:rPr lang="en-GB" b="1" dirty="0"/>
+              <a:t>Reinforcement Learning Implementation</a:t>
+            </a:r>
             <a:endParaRPr lang="en-GB" dirty="0"/>
           </a:p>
         </p:txBody>
@@ -7319,7 +7974,7 @@
         </p:nvSpPr>
         <p:spPr>
           <a:xfrm>
-            <a:off x="476250" y="2536825"/>
+            <a:off x="847725" y="2536825"/>
             <a:ext cx="1714500" cy="336550"/>
           </a:xfrm>
           <a:prstGeom prst="rect">
@@ -7362,7 +8017,7 @@
                   <a:schemeClr val="tx1"/>
                 </a:solidFill>
               </a:rPr>
-              <a:t>Atual</a:t>
+              <a:t>Inicial</a:t>
             </a:r>
             <a:endParaRPr lang="en-GB" dirty="0">
               <a:solidFill>
@@ -7386,7 +8041,7 @@
         </p:nvSpPr>
         <p:spPr>
           <a:xfrm>
-            <a:off x="476250" y="3122612"/>
+            <a:off x="847725" y="3122612"/>
             <a:ext cx="1714500" cy="336550"/>
           </a:xfrm>
           <a:prstGeom prst="rect">
@@ -7445,7 +8100,7 @@
         </p:nvSpPr>
         <p:spPr>
           <a:xfrm>
-            <a:off x="476250" y="3662362"/>
+            <a:off x="847725" y="3662362"/>
             <a:ext cx="1714500" cy="336550"/>
           </a:xfrm>
           <a:prstGeom prst="rect">
@@ -7504,7 +8159,7 @@
         </p:nvSpPr>
         <p:spPr>
           <a:xfrm>
-            <a:off x="476250" y="4187824"/>
+            <a:off x="847725" y="4187824"/>
             <a:ext cx="1714500" cy="336550"/>
           </a:xfrm>
           <a:prstGeom prst="rect">
@@ -7563,7 +8218,7 @@
         </p:nvSpPr>
         <p:spPr>
           <a:xfrm>
-            <a:off x="476250" y="4713285"/>
+            <a:off x="847725" y="4713285"/>
             <a:ext cx="1714500" cy="554039"/>
           </a:xfrm>
           <a:prstGeom prst="rect">
@@ -7633,7 +8288,7 @@
         </p:nvCxnSpPr>
         <p:spPr>
           <a:xfrm>
-            <a:off x="1333500" y="2873375"/>
+            <a:off x="1704975" y="2873375"/>
             <a:ext cx="0" cy="249237"/>
           </a:xfrm>
           <a:prstGeom prst="straightConnector1">
@@ -7675,7 +8330,7 @@
         </p:nvCxnSpPr>
         <p:spPr>
           <a:xfrm>
-            <a:off x="1333500" y="3459162"/>
+            <a:off x="1704975" y="3459162"/>
             <a:ext cx="0" cy="203200"/>
           </a:xfrm>
           <a:prstGeom prst="straightConnector1">
@@ -7717,7 +8372,7 @@
         </p:nvCxnSpPr>
         <p:spPr>
           <a:xfrm>
-            <a:off x="1333500" y="3998912"/>
+            <a:off x="1704975" y="3998912"/>
             <a:ext cx="0" cy="188912"/>
           </a:xfrm>
           <a:prstGeom prst="straightConnector1">
@@ -7759,7 +8414,7 @@
         </p:nvCxnSpPr>
         <p:spPr>
           <a:xfrm>
-            <a:off x="1333500" y="4524374"/>
+            <a:off x="1704975" y="4524374"/>
             <a:ext cx="0" cy="188911"/>
           </a:xfrm>
           <a:prstGeom prst="straightConnector1">
@@ -7801,7 +8456,7 @@
         </p:nvCxnSpPr>
         <p:spPr>
           <a:xfrm flipV="1">
-            <a:off x="2190750" y="3290887"/>
+            <a:off x="2562225" y="3290887"/>
             <a:ext cx="12700" cy="1699418"/>
           </a:xfrm>
           <a:prstGeom prst="bentConnector3">
@@ -7842,7 +8497,7 @@
         </p:nvSpPr>
         <p:spPr>
           <a:xfrm>
-            <a:off x="384175" y="2102922"/>
+            <a:off x="755650" y="2102922"/>
             <a:ext cx="1812925" cy="369332"/>
           </a:xfrm>
           <a:prstGeom prst="rect">
@@ -7893,13 +8548,13 @@
           <p:nvPr>
             <p:extLst>
               <p:ext uri="{D42A27DB-BD31-4B8C-83A1-F6EECF244321}">
-                <p14:modId xmlns:p14="http://schemas.microsoft.com/office/powerpoint/2010/main" val="3037308767"/>
+                <p14:modId xmlns:p14="http://schemas.microsoft.com/office/powerpoint/2010/main" val="913907247"/>
               </p:ext>
             </p:extLst>
           </p:nvPr>
         </p:nvGraphicFramePr>
         <p:xfrm>
-          <a:off x="2940050" y="2997993"/>
+          <a:off x="3997325" y="2997993"/>
           <a:ext cx="3365500" cy="1854200"/>
         </p:xfrm>
         <a:graphic>
@@ -8152,7 +8807,7 @@
         </p:nvSpPr>
         <p:spPr>
           <a:xfrm>
-            <a:off x="2863851" y="2102922"/>
+            <a:off x="3921126" y="2102922"/>
             <a:ext cx="3143248" cy="923330"/>
           </a:xfrm>
           <a:prstGeom prst="rect">
@@ -8238,7 +8893,7 @@
         </p:nvSpPr>
         <p:spPr>
           <a:xfrm>
-            <a:off x="6972300" y="2266950"/>
+            <a:off x="8397875" y="2232440"/>
             <a:ext cx="3409950" cy="4247317"/>
           </a:xfrm>
           <a:prstGeom prst="rect">
@@ -8783,9 +9438,6 @@
               <a:rPr lang="en-GB" dirty="0" err="1"/>
               <a:t>training_config.yaml</a:t>
             </a:r>
-            <a:br>
-              <a:rPr lang="en-GB" dirty="0"/>
-            </a:br>
             <a:r>
               <a:rPr lang="en-GB" dirty="0"/>
               <a:t>)</a:t>
@@ -9058,9 +9710,6 @@
               <a:rPr lang="en-GB" dirty="0" err="1"/>
               <a:t>training_config.yaml</a:t>
             </a:r>
-            <a:br>
-              <a:rPr lang="en-GB" dirty="0"/>
-            </a:br>
             <a:r>
               <a:rPr lang="en-GB" dirty="0"/>
               <a:t>)</a:t>
@@ -9390,9 +10039,6 @@
               <a:rPr lang="en-GB" dirty="0" err="1"/>
               <a:t>training_config.yaml</a:t>
             </a:r>
-            <a:br>
-              <a:rPr lang="en-GB" dirty="0"/>
-            </a:br>
             <a:r>
               <a:rPr lang="en-GB" dirty="0"/>
               <a:t>)</a:t>
@@ -9590,7 +10236,7 @@
           <p:cNvPr id="2" name="Title 1">
             <a:extLst>
               <a:ext uri="{FF2B5EF4-FFF2-40B4-BE49-F238E27FC236}">
-                <a16:creationId xmlns:a16="http://schemas.microsoft.com/office/drawing/2014/main" id="{01D7357C-7F07-D118-AC15-6A3D28ED2DDE}"/>
+                <a16:creationId xmlns:a16="http://schemas.microsoft.com/office/drawing/2014/main" id="{4153CCA6-F179-14CE-4D7F-0B025F26912B}"/>
               </a:ext>
             </a:extLst>
           </p:cNvPr>
@@ -9606,16 +10252,79 @@
           <a:bodyPr/>
           <a:lstStyle/>
           <a:p>
-            <a:endParaRPr lang="en-GB"/>
-          </a:p>
-        </p:txBody>
-      </p:sp>
-      <p:sp>
-        <p:nvSpPr>
-          <p:cNvPr id="3" name="Content Placeholder 2">
-            <a:extLst>
-              <a:ext uri="{FF2B5EF4-FFF2-40B4-BE49-F238E27FC236}">
-                <a16:creationId xmlns:a16="http://schemas.microsoft.com/office/drawing/2014/main" id="{3A5B0409-08FE-0BBA-2C7C-2BC3CEC003DD}"/>
+            <a:r>
+              <a:rPr lang="en-GB" dirty="0"/>
+              <a:t>Training</a:t>
+            </a:r>
+          </a:p>
+        </p:txBody>
+      </p:sp>
+      <p:pic>
+        <p:nvPicPr>
+          <p:cNvPr id="6" name="Picture 5">
+            <a:extLst>
+              <a:ext uri="{FF2B5EF4-FFF2-40B4-BE49-F238E27FC236}">
+                <a16:creationId xmlns:a16="http://schemas.microsoft.com/office/drawing/2014/main" id="{CD3988AA-5DE9-9E53-442C-4465BE9FBEF5}"/>
+              </a:ext>
+            </a:extLst>
+          </p:cNvPr>
+          <p:cNvPicPr>
+            <a:picLocks noChangeAspect="1"/>
+          </p:cNvPicPr>
+          <p:nvPr/>
+        </p:nvPicPr>
+        <p:blipFill>
+          <a:blip r:embed="rId2"/>
+          <a:stretch>
+            <a:fillRect/>
+          </a:stretch>
+        </p:blipFill>
+        <p:spPr>
+          <a:xfrm>
+            <a:off x="4838700" y="1690688"/>
+            <a:ext cx="3529164" cy="5086349"/>
+          </a:xfrm>
+          <a:prstGeom prst="rect">
+            <a:avLst/>
+          </a:prstGeom>
+        </p:spPr>
+      </p:pic>
+      <p:pic>
+        <p:nvPicPr>
+          <p:cNvPr id="8" name="Picture 7">
+            <a:extLst>
+              <a:ext uri="{FF2B5EF4-FFF2-40B4-BE49-F238E27FC236}">
+                <a16:creationId xmlns:a16="http://schemas.microsoft.com/office/drawing/2014/main" id="{2622B7A2-65C9-410B-D8EF-B1F920816625}"/>
+              </a:ext>
+            </a:extLst>
+          </p:cNvPr>
+          <p:cNvPicPr>
+            <a:picLocks noChangeAspect="1"/>
+          </p:cNvPicPr>
+          <p:nvPr/>
+        </p:nvPicPr>
+        <p:blipFill>
+          <a:blip r:embed="rId3"/>
+          <a:stretch>
+            <a:fillRect/>
+          </a:stretch>
+        </p:blipFill>
+        <p:spPr>
+          <a:xfrm>
+            <a:off x="428609" y="1714501"/>
+            <a:ext cx="4410091" cy="2980174"/>
+          </a:xfrm>
+          <a:prstGeom prst="rect">
+            <a:avLst/>
+          </a:prstGeom>
+        </p:spPr>
+      </p:pic>
+      <p:sp>
+        <p:nvSpPr>
+          <p:cNvPr id="9" name="Content Placeholder 2">
+            <a:extLst>
+              <a:ext uri="{FF2B5EF4-FFF2-40B4-BE49-F238E27FC236}">
+                <a16:creationId xmlns:a16="http://schemas.microsoft.com/office/drawing/2014/main" id="{1C885B0B-8FCE-B863-D03E-B4DA15D420E9}"/>
               </a:ext>
             </a:extLst>
           </p:cNvPr>
@@ -9626,254 +10335,144 @@
             <p:ph sz="half" idx="1"/>
           </p:nvPr>
         </p:nvSpPr>
-        <p:spPr/>
+        <p:spPr>
+          <a:xfrm>
+            <a:off x="8298732" y="1844675"/>
+            <a:ext cx="3759918" cy="4351338"/>
+          </a:xfrm>
+        </p:spPr>
         <p:txBody>
           <a:bodyPr>
-            <a:normAutofit fontScale="92500" lnSpcReduction="10000"/>
+            <a:normAutofit/>
           </a:bodyPr>
           <a:lstStyle/>
           <a:p>
             <a:r>
-              <a:rPr lang="en-GB" dirty="0"/>
+              <a:rPr lang="en-GB" sz="1600" dirty="0"/>
               <a:t>Train PPO</a:t>
             </a:r>
           </a:p>
           <a:p>
             <a:pPr lvl="1"/>
             <a:r>
-              <a:rPr lang="en-GB" dirty="0"/>
+              <a:rPr lang="en-GB" sz="1400" dirty="0"/>
               <a:t>python src/train.py --algo </a:t>
             </a:r>
             <a:r>
-              <a:rPr lang="en-GB" dirty="0" err="1"/>
+              <a:rPr lang="en-GB" sz="1400" dirty="0" err="1"/>
               <a:t>ppo</a:t>
             </a:r>
-            <a:endParaRPr lang="en-GB" dirty="0"/>
-          </a:p>
-          <a:p>
-            <a:r>
-              <a:rPr lang="en-GB" dirty="0"/>
+            <a:endParaRPr lang="en-GB" sz="1400" dirty="0"/>
+          </a:p>
+          <a:p>
+            <a:r>
+              <a:rPr lang="en-GB" sz="1600" dirty="0"/>
               <a:t>Train DQN</a:t>
             </a:r>
           </a:p>
           <a:p>
             <a:pPr lvl="1"/>
             <a:r>
-              <a:rPr lang="en-GB" dirty="0"/>
+              <a:rPr lang="en-GB" sz="1400" dirty="0"/>
               <a:t>python src/train.py --algo </a:t>
             </a:r>
             <a:r>
-              <a:rPr lang="en-GB" dirty="0" err="1"/>
+              <a:rPr lang="en-GB" sz="1400" dirty="0" err="1"/>
               <a:t>dqn</a:t>
             </a:r>
-            <a:endParaRPr lang="en-GB" dirty="0"/>
-          </a:p>
-          <a:p>
-            <a:r>
-              <a:rPr lang="en-GB" dirty="0"/>
+            <a:endParaRPr lang="en-GB" sz="1400" dirty="0"/>
+          </a:p>
+          <a:p>
+            <a:r>
+              <a:rPr lang="en-GB" sz="1600" dirty="0"/>
               <a:t>Train Both</a:t>
             </a:r>
           </a:p>
           <a:p>
             <a:pPr lvl="1"/>
             <a:r>
-              <a:rPr lang="en-GB" dirty="0"/>
+              <a:rPr lang="en-GB" sz="1400" dirty="0"/>
               <a:t>python src/train.py --config config/</a:t>
             </a:r>
             <a:r>
-              <a:rPr lang="en-GB" dirty="0" err="1"/>
+              <a:rPr lang="en-GB" sz="1400" dirty="0" err="1"/>
               <a:t>training_config.yaml</a:t>
             </a:r>
             <a:r>
-              <a:rPr lang="en-GB" dirty="0"/>
+              <a:rPr lang="en-GB" sz="1400" dirty="0"/>
               <a:t> --algo both</a:t>
             </a:r>
           </a:p>
           <a:p>
             <a:r>
-              <a:rPr lang="en-GB" dirty="0"/>
+              <a:rPr lang="en-GB" sz="1600" dirty="0"/>
               <a:t>Training Outputs</a:t>
             </a:r>
           </a:p>
           <a:p>
             <a:pPr lvl="1"/>
             <a:r>
-              <a:rPr lang="en-GB" dirty="0" err="1"/>
+              <a:rPr lang="en-GB" sz="1400" dirty="0" err="1"/>
               <a:t>Os</a:t>
             </a:r>
             <a:r>
-              <a:rPr lang="en-GB" dirty="0"/>
+              <a:rPr lang="en-GB" sz="1400" dirty="0"/>
               <a:t> </a:t>
             </a:r>
             <a:r>
-              <a:rPr lang="en-GB" dirty="0" err="1"/>
+              <a:rPr lang="en-GB" sz="1400" dirty="0" err="1"/>
               <a:t>modelos</a:t>
             </a:r>
             <a:r>
-              <a:rPr lang="en-GB" dirty="0"/>
+              <a:rPr lang="en-GB" sz="1400" dirty="0"/>
               <a:t> </a:t>
             </a:r>
             <a:r>
-              <a:rPr lang="en-GB" dirty="0" err="1"/>
+              <a:rPr lang="en-GB" sz="1400" dirty="0" err="1"/>
               <a:t>treinados</a:t>
             </a:r>
             <a:r>
-              <a:rPr lang="en-GB" dirty="0"/>
+              <a:rPr lang="en-GB" sz="1400" dirty="0"/>
               <a:t> </a:t>
             </a:r>
             <a:r>
-              <a:rPr lang="en-GB" dirty="0" err="1"/>
+              <a:rPr lang="en-GB" sz="1400" dirty="0" err="1"/>
               <a:t>são</a:t>
             </a:r>
             <a:r>
-              <a:rPr lang="en-GB" dirty="0"/>
+              <a:rPr lang="en-GB" sz="1400" dirty="0"/>
               <a:t> </a:t>
             </a:r>
             <a:r>
-              <a:rPr lang="en-GB" dirty="0" err="1"/>
+              <a:rPr lang="en-GB" sz="1400" dirty="0" err="1"/>
               <a:t>armazenados</a:t>
             </a:r>
             <a:r>
-              <a:rPr lang="en-GB" dirty="0"/>
+              <a:rPr lang="en-GB" sz="1400" dirty="0"/>
               <a:t> </a:t>
             </a:r>
             <a:r>
-              <a:rPr lang="en-GB" dirty="0" err="1"/>
+              <a:rPr lang="en-GB" sz="1400" dirty="0" err="1"/>
               <a:t>em</a:t>
             </a:r>
             <a:r>
-              <a:rPr lang="en-GB" dirty="0"/>
+              <a:rPr lang="en-GB" sz="1400" dirty="0"/>
               <a:t>:</a:t>
             </a:r>
           </a:p>
           <a:p>
             <a:pPr lvl="2"/>
             <a:r>
-              <a:rPr lang="en-GB" dirty="0"/>
+              <a:rPr lang="en-GB" sz="1200" dirty="0"/>
               <a:t>training/checkpoints/</a:t>
             </a:r>
-          </a:p>
-        </p:txBody>
-      </p:sp>
-      <p:sp>
-        <p:nvSpPr>
-          <p:cNvPr id="4" name="Content Placeholder 3">
-            <a:extLst>
-              <a:ext uri="{FF2B5EF4-FFF2-40B4-BE49-F238E27FC236}">
-                <a16:creationId xmlns:a16="http://schemas.microsoft.com/office/drawing/2014/main" id="{3253D45A-CD9F-BFFD-2F3F-8F0A97AD2B22}"/>
-              </a:ext>
-            </a:extLst>
-          </p:cNvPr>
-          <p:cNvSpPr>
-            <a:spLocks noGrp="1"/>
-          </p:cNvSpPr>
-          <p:nvPr>
-            <p:ph sz="half" idx="2"/>
-          </p:nvPr>
-        </p:nvSpPr>
-        <p:spPr/>
-        <p:txBody>
-          <a:bodyPr>
-            <a:normAutofit fontScale="92500" lnSpcReduction="10000"/>
-          </a:bodyPr>
-          <a:lstStyle/>
-          <a:p>
-            <a:r>
-              <a:rPr lang="en-GB" dirty="0"/>
-              <a:t>Evaluation</a:t>
-            </a:r>
-          </a:p>
-          <a:p>
-            <a:pPr lvl="1"/>
-            <a:r>
-              <a:rPr lang="en-GB" dirty="0" err="1"/>
-              <a:t>Comparação</a:t>
-            </a:r>
-            <a:r>
-              <a:rPr lang="en-GB" dirty="0"/>
-              <a:t> entre PPO e DQN:</a:t>
-            </a:r>
-          </a:p>
-          <a:p>
-            <a:pPr lvl="2"/>
-            <a:r>
-              <a:rPr lang="en-GB" dirty="0"/>
-              <a:t>python src/evaluate.py --algo compare --episodes 20</a:t>
-            </a:r>
-          </a:p>
-          <a:p>
-            <a:pPr lvl="1"/>
-            <a:r>
-              <a:rPr lang="en-GB" dirty="0" err="1"/>
-              <a:t>Avaliação</a:t>
-            </a:r>
-            <a:r>
-              <a:rPr lang="en-GB" dirty="0"/>
-              <a:t> individual:</a:t>
-            </a:r>
-          </a:p>
-          <a:p>
-            <a:pPr lvl="2"/>
-            <a:r>
-              <a:rPr lang="en-GB" dirty="0"/>
-              <a:t>python src/evaluate.py --algo </a:t>
-            </a:r>
-            <a:r>
-              <a:rPr lang="en-GB" dirty="0" err="1"/>
-              <a:t>ppo</a:t>
-            </a:r>
-            <a:r>
-              <a:rPr lang="en-GB" dirty="0"/>
-              <a:t> --model checkpoints/</a:t>
-            </a:r>
-            <a:r>
-              <a:rPr lang="en-GB" dirty="0" err="1"/>
-              <a:t>ppo</a:t>
-            </a:r>
-            <a:r>
-              <a:rPr lang="en-GB" dirty="0"/>
-              <a:t>/best/</a:t>
-            </a:r>
-            <a:r>
-              <a:rPr lang="en-GB" dirty="0" err="1"/>
-              <a:t>best_model</a:t>
-            </a:r>
-            <a:endParaRPr lang="en-GB" dirty="0"/>
-          </a:p>
-          <a:p>
-            <a:pPr lvl="2"/>
-            <a:r>
-              <a:rPr lang="en-GB" dirty="0"/>
-              <a:t>python src/evaluate.py --algo </a:t>
-            </a:r>
-            <a:r>
-              <a:rPr lang="en-GB" dirty="0" err="1"/>
-              <a:t>dqn</a:t>
-            </a:r>
-            <a:r>
-              <a:rPr lang="en-GB" dirty="0"/>
-              <a:t> --model checkpoints/</a:t>
-            </a:r>
-            <a:r>
-              <a:rPr lang="en-GB" dirty="0" err="1"/>
-              <a:t>dqn</a:t>
-            </a:r>
-            <a:r>
-              <a:rPr lang="en-GB" dirty="0"/>
-              <a:t>/best/</a:t>
-            </a:r>
-            <a:r>
-              <a:rPr lang="en-GB" dirty="0" err="1"/>
-              <a:t>best_model</a:t>
-            </a:r>
-            <a:endParaRPr lang="en-GB" dirty="0"/>
           </a:p>
         </p:txBody>
       </p:sp>
     </p:spTree>
     <p:extLst>
       <p:ext uri="{BB962C8B-B14F-4D97-AF65-F5344CB8AC3E}">
-        <p14:creationId xmlns:p14="http://schemas.microsoft.com/office/powerpoint/2010/main" val="2515127065"/>
+        <p14:creationId xmlns:p14="http://schemas.microsoft.com/office/powerpoint/2010/main" val="2787264298"/>
       </p:ext>
     </p:extLst>
   </p:cSld>
@@ -10196,4 +10795,319 @@
     </a:ext>
   </a:extLst>
 </a:theme>
+</file>
+
+<file path=ppt/theme/theme2.xml><?xml version="1.0" encoding="utf-8"?>
+<a:theme xmlns:a="http://schemas.openxmlformats.org/drawingml/2006/main" name="Office Theme">
+  <a:themeElements>
+    <a:clrScheme name="Office">
+      <a:dk1>
+        <a:sysClr val="windowText" lastClr="000000"/>
+      </a:dk1>
+      <a:lt1>
+        <a:sysClr val="window" lastClr="FFFFFF"/>
+      </a:lt1>
+      <a:dk2>
+        <a:srgbClr val="0E2841"/>
+      </a:dk2>
+      <a:lt2>
+        <a:srgbClr val="E8E8E8"/>
+      </a:lt2>
+      <a:accent1>
+        <a:srgbClr val="156082"/>
+      </a:accent1>
+      <a:accent2>
+        <a:srgbClr val="E97132"/>
+      </a:accent2>
+      <a:accent3>
+        <a:srgbClr val="196B24"/>
+      </a:accent3>
+      <a:accent4>
+        <a:srgbClr val="0F9ED5"/>
+      </a:accent4>
+      <a:accent5>
+        <a:srgbClr val="A02B93"/>
+      </a:accent5>
+      <a:accent6>
+        <a:srgbClr val="4EA72E"/>
+      </a:accent6>
+      <a:hlink>
+        <a:srgbClr val="467886"/>
+      </a:hlink>
+      <a:folHlink>
+        <a:srgbClr val="96607D"/>
+      </a:folHlink>
+    </a:clrScheme>
+    <a:fontScheme name="Office">
+      <a:majorFont>
+        <a:latin typeface="Aptos Display" panose="02110004020202020204"/>
+        <a:ea typeface=""/>
+        <a:cs typeface=""/>
+        <a:font script="Jpan" typeface="游ゴシック Light"/>
+        <a:font script="Hang" typeface="맑은 고딕"/>
+        <a:font script="Hans" typeface="等线 Light"/>
+        <a:font script="Hant" typeface="新細明體"/>
+        <a:font script="Arab" typeface="Times New Roman"/>
+        <a:font script="Hebr" typeface="Times New Roman"/>
+        <a:font script="Thai" typeface="Angsana New"/>
+        <a:font script="Ethi" typeface="Nyala"/>
+        <a:font script="Beng" typeface="Vrinda"/>
+        <a:font script="Gujr" typeface="Shruti"/>
+        <a:font script="Khmr" typeface="MoolBoran"/>
+        <a:font script="Knda" typeface="Tunga"/>
+        <a:font script="Guru" typeface="Raavi"/>
+        <a:font script="Cans" typeface="Euphemia"/>
+        <a:font script="Cher" typeface="Plantagenet Cherokee"/>
+        <a:font script="Yiii" typeface="Microsoft Yi Baiti"/>
+        <a:font script="Tibt" typeface="Microsoft Himalaya"/>
+        <a:font script="Thaa" typeface="MV Boli"/>
+        <a:font script="Deva" typeface="Mangal"/>
+        <a:font script="Telu" typeface="Gautami"/>
+        <a:font script="Taml" typeface="Latha"/>
+        <a:font script="Syrc" typeface="Estrangelo Edessa"/>
+        <a:font script="Orya" typeface="Kalinga"/>
+        <a:font script="Mlym" typeface="Kartika"/>
+        <a:font script="Laoo" typeface="DokChampa"/>
+        <a:font script="Sinh" typeface="Iskoola Pota"/>
+        <a:font script="Mong" typeface="Mongolian Baiti"/>
+        <a:font script="Viet" typeface="Times New Roman"/>
+        <a:font script="Uigh" typeface="Microsoft Uighur"/>
+        <a:font script="Geor" typeface="Sylfaen"/>
+        <a:font script="Armn" typeface="Arial"/>
+        <a:font script="Bugi" typeface="Leelawadee UI"/>
+        <a:font script="Bopo" typeface="Microsoft JhengHei"/>
+        <a:font script="Java" typeface="Javanese Text"/>
+        <a:font script="Lisu" typeface="Segoe UI"/>
+        <a:font script="Mymr" typeface="Myanmar Text"/>
+        <a:font script="Nkoo" typeface="Ebrima"/>
+        <a:font script="Olck" typeface="Nirmala UI"/>
+        <a:font script="Osma" typeface="Ebrima"/>
+        <a:font script="Phag" typeface="Phagspa"/>
+        <a:font script="Syrn" typeface="Estrangelo Edessa"/>
+        <a:font script="Syrj" typeface="Estrangelo Edessa"/>
+        <a:font script="Syre" typeface="Estrangelo Edessa"/>
+        <a:font script="Sora" typeface="Nirmala UI"/>
+        <a:font script="Tale" typeface="Microsoft Tai Le"/>
+        <a:font script="Talu" typeface="Microsoft New Tai Lue"/>
+        <a:font script="Tfng" typeface="Ebrima"/>
+      </a:majorFont>
+      <a:minorFont>
+        <a:latin typeface="Aptos" panose="02110004020202020204"/>
+        <a:ea typeface=""/>
+        <a:cs typeface=""/>
+        <a:font script="Jpan" typeface="游ゴシック"/>
+        <a:font script="Hang" typeface="맑은 고딕"/>
+        <a:font script="Hans" typeface="等线"/>
+        <a:font script="Hant" typeface="新細明體"/>
+        <a:font script="Arab" typeface="Arial"/>
+        <a:font script="Hebr" typeface="Arial"/>
+        <a:font script="Thai" typeface="Cordia New"/>
+        <a:font script="Ethi" typeface="Nyala"/>
+        <a:font script="Beng" typeface="Vrinda"/>
+        <a:font script="Gujr" typeface="Shruti"/>
+        <a:font script="Khmr" typeface="DaunPenh"/>
+        <a:font script="Knda" typeface="Tunga"/>
+        <a:font script="Guru" typeface="Raavi"/>
+        <a:font script="Cans" typeface="Euphemia"/>
+        <a:font script="Cher" typeface="Plantagenet Cherokee"/>
+        <a:font script="Yiii" typeface="Microsoft Yi Baiti"/>
+        <a:font script="Tibt" typeface="Microsoft Himalaya"/>
+        <a:font script="Thaa" typeface="MV Boli"/>
+        <a:font script="Deva" typeface="Mangal"/>
+        <a:font script="Telu" typeface="Gautami"/>
+        <a:font script="Taml" typeface="Latha"/>
+        <a:font script="Syrc" typeface="Estrangelo Edessa"/>
+        <a:font script="Orya" typeface="Kalinga"/>
+        <a:font script="Mlym" typeface="Kartika"/>
+        <a:font script="Laoo" typeface="DokChampa"/>
+        <a:font script="Sinh" typeface="Iskoola Pota"/>
+        <a:font script="Mong" typeface="Mongolian Baiti"/>
+        <a:font script="Viet" typeface="Arial"/>
+        <a:font script="Uigh" typeface="Microsoft Uighur"/>
+        <a:font script="Geor" typeface="Sylfaen"/>
+        <a:font script="Armn" typeface="Arial"/>
+        <a:font script="Bugi" typeface="Leelawadee UI"/>
+        <a:font script="Bopo" typeface="Microsoft JhengHei"/>
+        <a:font script="Java" typeface="Javanese Text"/>
+        <a:font script="Lisu" typeface="Segoe UI"/>
+        <a:font script="Mymr" typeface="Myanmar Text"/>
+        <a:font script="Nkoo" typeface="Ebrima"/>
+        <a:font script="Olck" typeface="Nirmala UI"/>
+        <a:font script="Osma" typeface="Ebrima"/>
+        <a:font script="Phag" typeface="Phagspa"/>
+        <a:font script="Syrn" typeface="Estrangelo Edessa"/>
+        <a:font script="Syrj" typeface="Estrangelo Edessa"/>
+        <a:font script="Syre" typeface="Estrangelo Edessa"/>
+        <a:font script="Sora" typeface="Nirmala UI"/>
+        <a:font script="Tale" typeface="Microsoft Tai Le"/>
+        <a:font script="Talu" typeface="Microsoft New Tai Lue"/>
+        <a:font script="Tfng" typeface="Ebrima"/>
+      </a:minorFont>
+    </a:fontScheme>
+    <a:fmtScheme name="Office">
+      <a:fillStyleLst>
+        <a:solidFill>
+          <a:schemeClr val="phClr"/>
+        </a:solidFill>
+        <a:gradFill rotWithShape="1">
+          <a:gsLst>
+            <a:gs pos="0">
+              <a:schemeClr val="phClr">
+                <a:lumMod val="110000"/>
+                <a:satMod val="105000"/>
+                <a:tint val="67000"/>
+              </a:schemeClr>
+            </a:gs>
+            <a:gs pos="50000">
+              <a:schemeClr val="phClr">
+                <a:lumMod val="105000"/>
+                <a:satMod val="103000"/>
+                <a:tint val="73000"/>
+              </a:schemeClr>
+            </a:gs>
+            <a:gs pos="100000">
+              <a:schemeClr val="phClr">
+                <a:lumMod val="105000"/>
+                <a:satMod val="109000"/>
+                <a:tint val="81000"/>
+              </a:schemeClr>
+            </a:gs>
+          </a:gsLst>
+          <a:lin ang="5400000" scaled="0"/>
+        </a:gradFill>
+        <a:gradFill rotWithShape="1">
+          <a:gsLst>
+            <a:gs pos="0">
+              <a:schemeClr val="phClr">
+                <a:satMod val="103000"/>
+                <a:lumMod val="102000"/>
+                <a:tint val="94000"/>
+              </a:schemeClr>
+            </a:gs>
+            <a:gs pos="50000">
+              <a:schemeClr val="phClr">
+                <a:satMod val="110000"/>
+                <a:lumMod val="100000"/>
+                <a:shade val="100000"/>
+              </a:schemeClr>
+            </a:gs>
+            <a:gs pos="100000">
+              <a:schemeClr val="phClr">
+                <a:lumMod val="99000"/>
+                <a:satMod val="120000"/>
+                <a:shade val="78000"/>
+              </a:schemeClr>
+            </a:gs>
+          </a:gsLst>
+          <a:lin ang="5400000" scaled="0"/>
+        </a:gradFill>
+      </a:fillStyleLst>
+      <a:lnStyleLst>
+        <a:ln w="12700" cap="flat" cmpd="sng" algn="ctr">
+          <a:solidFill>
+            <a:schemeClr val="phClr"/>
+          </a:solidFill>
+          <a:prstDash val="solid"/>
+          <a:miter lim="800000"/>
+        </a:ln>
+        <a:ln w="19050" cap="flat" cmpd="sng" algn="ctr">
+          <a:solidFill>
+            <a:schemeClr val="phClr"/>
+          </a:solidFill>
+          <a:prstDash val="solid"/>
+          <a:miter lim="800000"/>
+        </a:ln>
+        <a:ln w="25400" cap="flat" cmpd="sng" algn="ctr">
+          <a:solidFill>
+            <a:schemeClr val="phClr"/>
+          </a:solidFill>
+          <a:prstDash val="solid"/>
+          <a:miter lim="800000"/>
+        </a:ln>
+      </a:lnStyleLst>
+      <a:effectStyleLst>
+        <a:effectStyle>
+          <a:effectLst/>
+        </a:effectStyle>
+        <a:effectStyle>
+          <a:effectLst/>
+        </a:effectStyle>
+        <a:effectStyle>
+          <a:effectLst>
+            <a:outerShdw blurRad="57150" dist="19050" dir="5400000" algn="ctr" rotWithShape="0">
+              <a:srgbClr val="000000">
+                <a:alpha val="63000"/>
+              </a:srgbClr>
+            </a:outerShdw>
+          </a:effectLst>
+        </a:effectStyle>
+      </a:effectStyleLst>
+      <a:bgFillStyleLst>
+        <a:solidFill>
+          <a:schemeClr val="phClr"/>
+        </a:solidFill>
+        <a:solidFill>
+          <a:schemeClr val="phClr">
+            <a:tint val="95000"/>
+            <a:satMod val="170000"/>
+          </a:schemeClr>
+        </a:solidFill>
+        <a:gradFill rotWithShape="1">
+          <a:gsLst>
+            <a:gs pos="0">
+              <a:schemeClr val="phClr">
+                <a:tint val="93000"/>
+                <a:satMod val="150000"/>
+                <a:shade val="98000"/>
+                <a:lumMod val="102000"/>
+              </a:schemeClr>
+            </a:gs>
+            <a:gs pos="50000">
+              <a:schemeClr val="phClr">
+                <a:tint val="98000"/>
+                <a:satMod val="130000"/>
+                <a:shade val="90000"/>
+                <a:lumMod val="103000"/>
+              </a:schemeClr>
+            </a:gs>
+            <a:gs pos="100000">
+              <a:schemeClr val="phClr">
+                <a:shade val="63000"/>
+                <a:satMod val="120000"/>
+              </a:schemeClr>
+            </a:gs>
+          </a:gsLst>
+          <a:lin ang="5400000" scaled="0"/>
+        </a:gradFill>
+      </a:bgFillStyleLst>
+    </a:fmtScheme>
+  </a:themeElements>
+  <a:objectDefaults>
+    <a:lnDef>
+      <a:spPr/>
+      <a:bodyPr/>
+      <a:lstStyle/>
+      <a:style>
+        <a:lnRef idx="2">
+          <a:schemeClr val="accent1"/>
+        </a:lnRef>
+        <a:fillRef idx="0">
+          <a:schemeClr val="accent1"/>
+        </a:fillRef>
+        <a:effectRef idx="1">
+          <a:schemeClr val="accent1"/>
+        </a:effectRef>
+        <a:fontRef idx="minor">
+          <a:schemeClr val="tx1"/>
+        </a:fontRef>
+      </a:style>
+    </a:lnDef>
+  </a:objectDefaults>
+  <a:extraClrSchemeLst/>
+  <a:extLst>
+    <a:ext uri="{05A4C25C-085E-4340-85A3-A5531E510DB2}">
+      <thm15:themeFamily xmlns:thm15="http://schemas.microsoft.com/office/thememl/2012/main" name="Office Theme" id="{2E142A2C-CD16-42D6-873A-C26D2A0506FA}" vid="{1BDDFF52-6CD6-40A5-AB3C-68EB2F1E4D0A}"/>
+    </a:ext>
+  </a:extLst>
+</a:theme>
 </file>